--- a/specs/03-features/R_example.pptx
+++ b/specs/03-features/R_example.pptx
@@ -171,74 +171,66 @@
             </c:spPr>
           </c:marker>
           <c:cat>
-            <c:multiLvlStrRef>
-              <c:f>Sheet1!$A$2:$A$10</c:f>
-              <c:multiLvlStrCache>
-                <c:ptCount val="9"/>
-                <c:lvl>
-                  <c:pt idx="0">
-                    <c:v>도로접면</c:v>
-                  </c:pt>
-                  <c:pt idx="1">
-                    <c:v>역과의거리</c:v>
-                  </c:pt>
-                  <c:pt idx="2">
-                    <c:v>유동인구</c:v>
-                  </c:pt>
-                  <c:pt idx="3">
-                    <c:v>용도지역</c:v>
-                  </c:pt>
-                  <c:pt idx="4">
-                    <c:v>사용승인일</c:v>
-                  </c:pt>
-                  <c:pt idx="5">
-                    <c:v>엘리베이터</c:v>
-                  </c:pt>
-                  <c:pt idx="6">
-                    <c:v>대수선·리모델링</c:v>
-                  </c:pt>
-                  <c:pt idx="7">
-                    <c:v>지형형상</c:v>
-                  </c:pt>
-                  <c:pt idx="8">
-                    <c:v>경사도</c:v>
-                  </c:pt>
-                </c:lvl>
-              </c:multiLvlStrCache>
-            </c:multiLvlStrRef>
+            <c:strRef>
+              <c:f>Sheet1!$A$2:$A$9</c:f>
+              <c:strCache>
+                <c:ptCount val="8"/>
+                <c:pt idx="0">
+                  <c:v>도로접면</c:v>
+                </c:pt>
+                <c:pt idx="1">
+                  <c:v>역과의거리</c:v>
+                </c:pt>
+                <c:pt idx="2">
+                  <c:v>용도지역</c:v>
+                </c:pt>
+                <c:pt idx="3">
+                  <c:v>지형형상</c:v>
+                </c:pt>
+                <c:pt idx="4">
+                  <c:v>사용승인일</c:v>
+                </c:pt>
+                <c:pt idx="5">
+                  <c:v>엘리베이터</c:v>
+                </c:pt>
+                <c:pt idx="6">
+                  <c:v>대수선·리모델링</c:v>
+                </c:pt>
+                <c:pt idx="7">
+                  <c:v>경사도</c:v>
+                </c:pt>
+              </c:strCache>
+            </c:strRef>
           </c:cat>
           <c:val>
             <c:numRef>
-              <c:f>Sheet1!$B$2:$B$10</c:f>
+              <c:f>Sheet1!$B$2:$B$9</c:f>
               <c:numCache>
                 <c:formatCode>General</c:formatCode>
-                <c:ptCount val="9"/>
+                <c:ptCount val="8"/>
                 <c:pt idx="0">
-                  <c:v>85</c:v>
+                  <c:v>85.0</c:v>
                 </c:pt>
                 <c:pt idx="1">
-                  <c:v>91</c:v>
+                  <c:v>91.0</c:v>
                 </c:pt>
                 <c:pt idx="2">
-                  <c:v>74</c:v>
+                  <c:v>90.0</c:v>
                 </c:pt>
                 <c:pt idx="3">
-                  <c:v>90</c:v>
+                  <c:v>80.0</c:v>
                 </c:pt>
                 <c:pt idx="4">
-                  <c:v>70</c:v>
+                  <c:v>70.0</c:v>
                 </c:pt>
                 <c:pt idx="5">
-                  <c:v>80</c:v>
+                  <c:v>80.0</c:v>
                 </c:pt>
                 <c:pt idx="6">
-                  <c:v>70</c:v>
+                  <c:v>70.0</c:v>
                 </c:pt>
                 <c:pt idx="7">
-                  <c:v>80</c:v>
-                </c:pt>
-                <c:pt idx="8">
-                  <c:v>60</c:v>
+                  <c:v>60.0</c:v>
                 </c:pt>
               </c:numCache>
             </c:numRef>
@@ -299,7 +291,7 @@
             <a:pPr>
               <a:defRPr sz="850" b="0" i="0" u="none" strike="noStrike">
                 <a:solidFill>
-                  <a:srgbClr val="1E2B5C"/>
+                  <a:srgbClr val="0F1A2E"/>
                 </a:solidFill>
                 <a:latin typeface="Arial"/>
               </a:defRPr>
@@ -404,7 +396,7 @@
             <a:pPr>
               <a:defRPr sz="1000" b="0" i="0" u="none" strike="noStrike">
                 <a:solidFill>
-                  <a:srgbClr val="1E2B5C"/>
+                  <a:srgbClr val="0F1A2E"/>
                 </a:solidFill>
                 <a:latin typeface="Arial"/>
               </a:defRPr>
@@ -412,7 +404,7 @@
             <a:r>
               <a:rPr sz="1000" b="0" i="0" u="none" strike="noStrike">
                 <a:solidFill>
-                  <a:srgbClr val="1E2B5C"/>
+                  <a:srgbClr val="0F1A2E"/>
                 </a:solidFill>
                 <a:latin typeface="Arial"/>
               </a:rPr>
@@ -560,7 +552,7 @@
           </c:tx>
           <c:spPr>
             <a:solidFill>
-              <a:srgbClr val="EE7D22"/>
+              <a:srgbClr val="1E5AF0"/>
             </a:solidFill>
             <a:effectLst/>
           </c:spPr>
@@ -819,7 +811,7 @@
             <a:pPr>
               <a:defRPr sz="1000" b="0" i="0" u="none" strike="noStrike">
                 <a:solidFill>
-                  <a:srgbClr val="1E2B5C"/>
+                  <a:srgbClr val="0F1A2E"/>
                 </a:solidFill>
                 <a:latin typeface="Arial"/>
               </a:defRPr>
@@ -827,7 +819,7 @@
             <a:r>
               <a:rPr sz="1000" b="0" i="0" u="none" strike="noStrike">
                 <a:solidFill>
-                  <a:srgbClr val="1E2B5C"/>
+                  <a:srgbClr val="0F1A2E"/>
                 </a:solidFill>
                 <a:latin typeface="Arial"/>
               </a:rPr>
@@ -963,7 +955,7 @@
           </c:tx>
           <c:spPr>
             <a:solidFill>
-              <a:srgbClr val="EE7D22"/>
+              <a:srgbClr val="1E5AF0"/>
             </a:solidFill>
             <a:effectLst/>
           </c:spPr>
@@ -2614,7 +2606,7 @@
             <a:r>
               <a:rPr lang="en-US" sz="1800" b="1" dirty="0">
                 <a:solidFill>
-                  <a:srgbClr val="1E2B5C"/>
+                  <a:srgbClr val="0F1A2E"/>
                 </a:solidFill>
                 <a:latin typeface="Malgun Gothic" pitchFamily="34" charset="0"/>
                 <a:ea typeface="Malgun Gothic" pitchFamily="34" charset="-122"/>
@@ -2628,7 +2620,7 @@
             <a:r>
               <a:rPr lang="en-US" sz="900" b="1" dirty="0">
                 <a:solidFill>
-                  <a:srgbClr val="EE7D22"/>
+                  <a:srgbClr val="1E5AF0"/>
                 </a:solidFill>
                 <a:latin typeface="Malgun Gothic" pitchFamily="34" charset="0"/>
                 <a:ea typeface="Malgun Gothic" pitchFamily="34" charset="-122"/>
@@ -2695,7 +2687,7 @@
             <a:r>
               <a:rPr lang="en-US" sz="900" b="1" dirty="0">
                 <a:solidFill>
-                  <a:srgbClr val="1E2B5C"/>
+                  <a:srgbClr val="0F1A2E"/>
                 </a:solidFill>
                 <a:latin typeface="Malgun Gothic" pitchFamily="34" charset="0"/>
                 <a:ea typeface="Malgun Gothic" pitchFamily="34" charset="-122"/>
@@ -2748,7 +2740,7 @@
             <a:r>
               <a:rPr lang="en-US" sz="4000" b="1" dirty="0">
                 <a:solidFill>
-                  <a:srgbClr val="1E2B5C"/>
+                  <a:srgbClr val="0F1A2E"/>
                 </a:solidFill>
                 <a:latin typeface="Malgun Gothic" pitchFamily="34" charset="0"/>
                 <a:ea typeface="Malgun Gothic" pitchFamily="34" charset="-122"/>
@@ -2884,7 +2876,7 @@
             <a:r>
               <a:rPr lang="en-US" sz="1200" b="1" dirty="0">
                 <a:solidFill>
-                  <a:srgbClr val="1E2B5C"/>
+                  <a:srgbClr val="0F1A2E"/>
                 </a:solidFill>
                 <a:latin typeface="Malgun Gothic" pitchFamily="34" charset="0"/>
                 <a:ea typeface="Malgun Gothic" pitchFamily="34" charset="-122"/>
@@ -2939,7 +2931,7 @@
             </a:avLst>
           </a:prstGeom>
           <a:solidFill>
-            <a:srgbClr val="EE7D22"/>
+            <a:srgbClr val="1E5AF0"/>
           </a:solidFill>
           <a:ln/>
         </p:spPr>
@@ -3014,13 +3006,13 @@
             <a:r>
               <a:rPr lang="en-US" sz="2400" b="1" dirty="0">
                 <a:solidFill>
-                  <a:srgbClr val="1E2B5C"/>
-                </a:solidFill>
-                <a:latin typeface="Malgun Gothic" pitchFamily="34" charset="0"/>
-                <a:ea typeface="Malgun Gothic" pitchFamily="34" charset="-122"/>
-                <a:cs typeface="Malgun Gothic" pitchFamily="34" charset="-120"/>
-              </a:rPr>
-              <a:t>80.4</a:t>
+                  <a:srgbClr val="0F1A2E"/>
+                </a:solidFill>
+                <a:latin typeface="Malgun Gothic" pitchFamily="34" charset="0"/>
+                <a:ea typeface="Malgun Gothic" pitchFamily="34" charset="-122"/>
+                <a:cs typeface="Malgun Gothic" pitchFamily="34" charset="-120"/>
+              </a:rPr>
+              <a:t>82.2</a:t>
             </a:r>
             <a:pPr algn="r" indent="0" marL="0">
               <a:buNone/>
@@ -3028,7 +3020,7 @@
             <a:r>
               <a:rPr lang="en-US" sz="1100" b="1" dirty="0">
                 <a:solidFill>
-                  <a:srgbClr val="1E2B5C"/>
+                  <a:srgbClr val="0F1A2E"/>
                 </a:solidFill>
                 <a:latin typeface="Malgun Gothic" pitchFamily="34" charset="0"/>
                 <a:ea typeface="Malgun Gothic" pitchFamily="34" charset="-122"/>
@@ -3101,7 +3093,7 @@
             <a:r>
               <a:rPr lang="en-US" sz="1200" b="1" dirty="0">
                 <a:solidFill>
-                  <a:srgbClr val="1E2B5C"/>
+                  <a:srgbClr val="0F1A2E"/>
                 </a:solidFill>
                 <a:latin typeface="Malgun Gothic" pitchFamily="34" charset="0"/>
                 <a:ea typeface="Malgun Gothic" pitchFamily="34" charset="-122"/>
@@ -3166,7 +3158,7 @@
             <a:r>
               <a:rPr lang="en-US" sz="2400" b="1" dirty="0">
                 <a:solidFill>
-                  <a:srgbClr val="1E2B5C"/>
+                  <a:srgbClr val="0F1A2E"/>
                 </a:solidFill>
                 <a:latin typeface="Malgun Gothic" pitchFamily="34" charset="0"/>
                 <a:ea typeface="Malgun Gothic" pitchFamily="34" charset="-122"/>
@@ -3180,7 +3172,7 @@
             <a:r>
               <a:rPr lang="en-US" sz="1100" b="1" dirty="0">
                 <a:solidFill>
-                  <a:srgbClr val="1E2B5C"/>
+                  <a:srgbClr val="0F1A2E"/>
                 </a:solidFill>
                 <a:latin typeface="Malgun Gothic" pitchFamily="34" charset="0"/>
                 <a:ea typeface="Malgun Gothic" pitchFamily="34" charset="-122"/>
@@ -3253,7 +3245,7 @@
             <a:r>
               <a:rPr lang="en-US" sz="1200" b="1" dirty="0">
                 <a:solidFill>
-                  <a:srgbClr val="1E2B5C"/>
+                  <a:srgbClr val="0F1A2E"/>
                 </a:solidFill>
                 <a:latin typeface="Malgun Gothic" pitchFamily="34" charset="0"/>
                 <a:ea typeface="Malgun Gothic" pitchFamily="34" charset="-122"/>
@@ -3405,7 +3397,7 @@
             <a:r>
               <a:rPr lang="en-US" sz="1200" b="1" dirty="0">
                 <a:solidFill>
-                  <a:srgbClr val="1E2B5C"/>
+                  <a:srgbClr val="0F1A2E"/>
                 </a:solidFill>
                 <a:latin typeface="Malgun Gothic" pitchFamily="34" charset="0"/>
                 <a:ea typeface="Malgun Gothic" pitchFamily="34" charset="-122"/>
@@ -3496,7 +3488,7 @@
             <a:r>
               <a:rPr lang="en-US" sz="900" b="1" dirty="0">
                 <a:solidFill>
-                  <a:srgbClr val="EE7D22"/>
+                  <a:srgbClr val="1E5AF0"/>
                 </a:solidFill>
                 <a:latin typeface="Malgun Gothic" pitchFamily="34" charset="0"/>
                 <a:ea typeface="Malgun Gothic" pitchFamily="34" charset="-122"/>
@@ -3535,7 +3527,7 @@
             <a:r>
               <a:rPr lang="en-US" sz="2400" b="1" dirty="0">
                 <a:solidFill>
-                  <a:srgbClr val="EE7D22"/>
+                  <a:srgbClr val="1E5AF0"/>
                 </a:solidFill>
                 <a:latin typeface="Malgun Gothic" pitchFamily="34" charset="0"/>
                 <a:ea typeface="Malgun Gothic" pitchFamily="34" charset="-122"/>
@@ -3549,7 +3541,7 @@
             <a:r>
               <a:rPr lang="en-US" sz="1100" b="1" dirty="0">
                 <a:solidFill>
-                  <a:srgbClr val="EE7D22"/>
+                  <a:srgbClr val="1E5AF0"/>
                 </a:solidFill>
                 <a:latin typeface="Malgun Gothic" pitchFamily="34" charset="0"/>
                 <a:ea typeface="Malgun Gothic" pitchFamily="34" charset="-122"/>
@@ -3622,7 +3614,7 @@
             <a:r>
               <a:rPr lang="en-US" sz="1200" b="1" dirty="0">
                 <a:solidFill>
-                  <a:srgbClr val="1E2B5C"/>
+                  <a:srgbClr val="0F1A2E"/>
                 </a:solidFill>
                 <a:latin typeface="Malgun Gothic" pitchFamily="34" charset="0"/>
                 <a:ea typeface="Malgun Gothic" pitchFamily="34" charset="-122"/>
@@ -3687,7 +3679,7 @@
             <a:r>
               <a:rPr lang="en-US" sz="2400" b="1" dirty="0">
                 <a:solidFill>
-                  <a:srgbClr val="1E2B5C"/>
+                  <a:srgbClr val="0F1A2E"/>
                 </a:solidFill>
                 <a:latin typeface="Malgun Gothic" pitchFamily="34" charset="0"/>
                 <a:ea typeface="Malgun Gothic" pitchFamily="34" charset="-122"/>
@@ -3701,7 +3693,7 @@
             <a:r>
               <a:rPr lang="en-US" sz="1100" b="1" dirty="0">
                 <a:solidFill>
-                  <a:srgbClr val="1E2B5C"/>
+                  <a:srgbClr val="0F1A2E"/>
                 </a:solidFill>
                 <a:latin typeface="Malgun Gothic" pitchFamily="34" charset="0"/>
                 <a:ea typeface="Malgun Gothic" pitchFamily="34" charset="-122"/>
@@ -3774,7 +3766,7 @@
             <a:r>
               <a:rPr lang="en-US" sz="1200" b="1" dirty="0">
                 <a:solidFill>
-                  <a:srgbClr val="1E2B5C"/>
+                  <a:srgbClr val="0F1A2E"/>
                 </a:solidFill>
                 <a:latin typeface="Malgun Gothic" pitchFamily="34" charset="0"/>
                 <a:ea typeface="Malgun Gothic" pitchFamily="34" charset="-122"/>
@@ -3880,7 +3872,7 @@
             <a:avLst/>
           </a:prstGeom>
           <a:solidFill>
-            <a:srgbClr val="1E2B5C"/>
+            <a:srgbClr val="0F1A2E"/>
           </a:solidFill>
           <a:ln/>
         </p:spPr>
@@ -4008,7 +4000,7 @@
             <a:r>
               <a:rPr lang="en-US" sz="850" b="1" dirty="0">
                 <a:solidFill>
-                  <a:srgbClr val="EE7D22"/>
+                  <a:srgbClr val="1E5AF0"/>
                 </a:solidFill>
                 <a:latin typeface="Malgun Gothic" pitchFamily="34" charset="0"/>
                 <a:ea typeface="Malgun Gothic" pitchFamily="34" charset="-122"/>
@@ -4072,7 +4064,7 @@
             <a:r>
               <a:rPr lang="en-US" sz="1800" b="1" dirty="0">
                 <a:solidFill>
-                  <a:srgbClr val="1E2B5C"/>
+                  <a:srgbClr val="0F1A2E"/>
                 </a:solidFill>
                 <a:latin typeface="Malgun Gothic" pitchFamily="34" charset="0"/>
                 <a:ea typeface="Malgun Gothic" pitchFamily="34" charset="-122"/>
@@ -4086,7 +4078,7 @@
             <a:r>
               <a:rPr lang="en-US" sz="900" b="1" dirty="0">
                 <a:solidFill>
-                  <a:srgbClr val="EE7D22"/>
+                  <a:srgbClr val="1E5AF0"/>
                 </a:solidFill>
                 <a:latin typeface="Malgun Gothic" pitchFamily="34" charset="0"/>
                 <a:ea typeface="Malgun Gothic" pitchFamily="34" charset="-122"/>
@@ -4153,7 +4145,7 @@
             <a:r>
               <a:rPr lang="en-US" sz="900" b="1" dirty="0">
                 <a:solidFill>
-                  <a:srgbClr val="1E2B5C"/>
+                  <a:srgbClr val="0F1A2E"/>
                 </a:solidFill>
                 <a:latin typeface="Malgun Gothic" pitchFamily="34" charset="0"/>
                 <a:ea typeface="Malgun Gothic" pitchFamily="34" charset="-122"/>
@@ -4196,7 +4188,7 @@
             </a:avLst>
           </a:prstGeom>
           <a:solidFill>
-            <a:srgbClr val="1E2B5C"/>
+            <a:srgbClr val="0F1A2E"/>
           </a:solidFill>
           <a:ln/>
         </p:spPr>
@@ -4271,7 +4263,7 @@
             <a:r>
               <a:rPr lang="en-US" sz="2600" b="1" dirty="0">
                 <a:solidFill>
-                  <a:srgbClr val="1E2B5C"/>
+                  <a:srgbClr val="0F1A2E"/>
                 </a:solidFill>
                 <a:latin typeface="Malgun Gothic" pitchFamily="34" charset="0"/>
                 <a:ea typeface="Malgun Gothic" pitchFamily="34" charset="-122"/>
@@ -4360,7 +4352,7 @@
                       <a:r>
                         <a:rPr lang="en-US" sz="950" b="1" dirty="0">
                           <a:solidFill>
-                            <a:srgbClr val="1E2B5C"/>
+                            <a:srgbClr val="0F1A2E"/>
                           </a:solidFill>
                           <a:latin typeface="Malgun Gothic" pitchFamily="34" charset="0"/>
                           <a:ea typeface="Malgun Gothic" pitchFamily="34" charset="-122"/>
@@ -4428,7 +4420,7 @@
                       <a:r>
                         <a:rPr lang="en-US" sz="950" b="1" dirty="0">
                           <a:solidFill>
-                            <a:srgbClr val="EE7D22"/>
+                            <a:srgbClr val="1E5AF0"/>
                           </a:solidFill>
                           <a:latin typeface="Malgun Gothic" pitchFamily="34" charset="0"/>
                           <a:ea typeface="Malgun Gothic" pitchFamily="34" charset="-122"/>
@@ -4495,7 +4487,7 @@
                       <a:r>
                         <a:rPr lang="en-US" sz="950" b="1" dirty="0">
                           <a:solidFill>
-                            <a:srgbClr val="1E2B5C"/>
+                            <a:srgbClr val="0F1A2E"/>
                           </a:solidFill>
                           <a:latin typeface="Malgun Gothic" pitchFamily="34" charset="0"/>
                           <a:ea typeface="Malgun Gothic" pitchFamily="34" charset="-122"/>
@@ -4630,7 +4622,7 @@
                       <a:r>
                         <a:rPr lang="en-US" sz="950" b="1" dirty="0">
                           <a:solidFill>
-                            <a:srgbClr val="1E2B5C"/>
+                            <a:srgbClr val="0F1A2E"/>
                           </a:solidFill>
                           <a:latin typeface="Malgun Gothic" pitchFamily="34" charset="0"/>
                           <a:ea typeface="Malgun Gothic" pitchFamily="34" charset="-122"/>
@@ -4765,7 +4757,7 @@
                       <a:r>
                         <a:rPr lang="en-US" sz="950" b="1" dirty="0">
                           <a:solidFill>
-                            <a:srgbClr val="1E2B5C"/>
+                            <a:srgbClr val="0F1A2E"/>
                           </a:solidFill>
                           <a:latin typeface="Malgun Gothic" pitchFamily="34" charset="0"/>
                           <a:ea typeface="Malgun Gothic" pitchFamily="34" charset="-122"/>
@@ -4900,7 +4892,7 @@
                       <a:r>
                         <a:rPr lang="en-US" sz="950" b="1" dirty="0">
                           <a:solidFill>
-                            <a:srgbClr val="1E2B5C"/>
+                            <a:srgbClr val="0F1A2E"/>
                           </a:solidFill>
                           <a:latin typeface="Malgun Gothic" pitchFamily="34" charset="0"/>
                           <a:ea typeface="Malgun Gothic" pitchFamily="34" charset="-122"/>
@@ -5035,7 +5027,7 @@
                       <a:r>
                         <a:rPr lang="en-US" sz="950" b="1" dirty="0">
                           <a:solidFill>
-                            <a:srgbClr val="1E2B5C"/>
+                            <a:srgbClr val="0F1A2E"/>
                           </a:solidFill>
                           <a:latin typeface="Malgun Gothic" pitchFamily="34" charset="0"/>
                           <a:ea typeface="Malgun Gothic" pitchFamily="34" charset="-122"/>
@@ -5170,7 +5162,7 @@
                       <a:r>
                         <a:rPr lang="en-US" sz="950" b="1" dirty="0">
                           <a:solidFill>
-                            <a:srgbClr val="1E2B5C"/>
+                            <a:srgbClr val="0F1A2E"/>
                           </a:solidFill>
                           <a:latin typeface="Malgun Gothic" pitchFamily="34" charset="0"/>
                           <a:ea typeface="Malgun Gothic" pitchFamily="34" charset="-122"/>
@@ -5305,7 +5297,7 @@
                       <a:r>
                         <a:rPr lang="en-US" sz="950" b="1" dirty="0">
                           <a:solidFill>
-                            <a:srgbClr val="1E2B5C"/>
+                            <a:srgbClr val="0F1A2E"/>
                           </a:solidFill>
                           <a:latin typeface="Malgun Gothic" pitchFamily="34" charset="0"/>
                           <a:ea typeface="Malgun Gothic" pitchFamily="34" charset="-122"/>
@@ -5440,7 +5432,7 @@
                       <a:r>
                         <a:rPr lang="en-US" sz="950" b="1" dirty="0">
                           <a:solidFill>
-                            <a:srgbClr val="1E2B5C"/>
+                            <a:srgbClr val="0F1A2E"/>
                           </a:solidFill>
                           <a:latin typeface="Malgun Gothic" pitchFamily="34" charset="0"/>
                           <a:ea typeface="Malgun Gothic" pitchFamily="34" charset="-122"/>
@@ -5575,7 +5567,7 @@
                       <a:r>
                         <a:rPr lang="en-US" sz="950" b="1" dirty="0">
                           <a:solidFill>
-                            <a:srgbClr val="1E2B5C"/>
+                            <a:srgbClr val="0F1A2E"/>
                           </a:solidFill>
                           <a:latin typeface="Malgun Gothic" pitchFamily="34" charset="0"/>
                           <a:ea typeface="Malgun Gothic" pitchFamily="34" charset="-122"/>
@@ -5710,7 +5702,7 @@
                       <a:r>
                         <a:rPr lang="en-US" sz="950" b="1" dirty="0">
                           <a:solidFill>
-                            <a:srgbClr val="1E2B5C"/>
+                            <a:srgbClr val="0F1A2E"/>
                           </a:solidFill>
                           <a:latin typeface="Malgun Gothic" pitchFamily="34" charset="0"/>
                           <a:ea typeface="Malgun Gothic" pitchFamily="34" charset="-122"/>
@@ -5845,7 +5837,7 @@
                       <a:r>
                         <a:rPr lang="en-US" sz="950" b="1" dirty="0">
                           <a:solidFill>
-                            <a:srgbClr val="1E2B5C"/>
+                            <a:srgbClr val="0F1A2E"/>
                           </a:solidFill>
                           <a:latin typeface="Malgun Gothic" pitchFamily="34" charset="0"/>
                           <a:ea typeface="Malgun Gothic" pitchFamily="34" charset="-122"/>
@@ -5980,7 +5972,7 @@
                       <a:r>
                         <a:rPr lang="en-US" sz="950" b="1" dirty="0">
                           <a:solidFill>
-                            <a:srgbClr val="1E2B5C"/>
+                            <a:srgbClr val="0F1A2E"/>
                           </a:solidFill>
                           <a:latin typeface="Malgun Gothic" pitchFamily="34" charset="0"/>
                           <a:ea typeface="Malgun Gothic" pitchFamily="34" charset="-122"/>
@@ -6115,7 +6107,7 @@
                       <a:r>
                         <a:rPr lang="en-US" sz="950" b="1" dirty="0">
                           <a:solidFill>
-                            <a:srgbClr val="1E2B5C"/>
+                            <a:srgbClr val="0F1A2E"/>
                           </a:solidFill>
                           <a:latin typeface="Malgun Gothic" pitchFamily="34" charset="0"/>
                           <a:ea typeface="Malgun Gothic" pitchFamily="34" charset="-122"/>
@@ -6250,7 +6242,7 @@
                       <a:r>
                         <a:rPr lang="en-US" sz="950" b="1" dirty="0">
                           <a:solidFill>
-                            <a:srgbClr val="1E2B5C"/>
+                            <a:srgbClr val="0F1A2E"/>
                           </a:solidFill>
                           <a:latin typeface="Malgun Gothic" pitchFamily="34" charset="0"/>
                           <a:ea typeface="Malgun Gothic" pitchFamily="34" charset="-122"/>
@@ -6385,7 +6377,7 @@
                       <a:r>
                         <a:rPr lang="en-US" sz="950" b="1" dirty="0">
                           <a:solidFill>
-                            <a:srgbClr val="1E2B5C"/>
+                            <a:srgbClr val="0F1A2E"/>
                           </a:solidFill>
                           <a:latin typeface="Malgun Gothic" pitchFamily="34" charset="0"/>
                           <a:ea typeface="Malgun Gothic" pitchFamily="34" charset="-122"/>
@@ -6520,7 +6512,7 @@
                       <a:r>
                         <a:rPr lang="en-US" sz="950" b="1" dirty="0">
                           <a:solidFill>
-                            <a:srgbClr val="1E2B5C"/>
+                            <a:srgbClr val="0F1A2E"/>
                           </a:solidFill>
                           <a:latin typeface="Malgun Gothic" pitchFamily="34" charset="0"/>
                           <a:ea typeface="Malgun Gothic" pitchFamily="34" charset="-122"/>
@@ -6655,7 +6647,7 @@
                       <a:r>
                         <a:rPr lang="en-US" sz="950" b="1" dirty="0">
                           <a:solidFill>
-                            <a:srgbClr val="1E2B5C"/>
+                            <a:srgbClr val="0F1A2E"/>
                           </a:solidFill>
                           <a:latin typeface="Malgun Gothic" pitchFamily="34" charset="0"/>
                           <a:ea typeface="Malgun Gothic" pitchFamily="34" charset="-122"/>
@@ -6790,7 +6782,7 @@
                       <a:r>
                         <a:rPr lang="en-US" sz="950" b="1" dirty="0">
                           <a:solidFill>
-                            <a:srgbClr val="1E2B5C"/>
+                            <a:srgbClr val="0F1A2E"/>
                           </a:solidFill>
                           <a:latin typeface="Malgun Gothic" pitchFamily="34" charset="0"/>
                           <a:ea typeface="Malgun Gothic" pitchFamily="34" charset="-122"/>
@@ -6944,7 +6936,7 @@
             <a:r>
               <a:rPr lang="en-US" sz="1400" b="1" dirty="0">
                 <a:solidFill>
-                  <a:srgbClr val="1E2B5C"/>
+                  <a:srgbClr val="0F1A2E"/>
                 </a:solidFill>
                 <a:latin typeface="Malgun Gothic" pitchFamily="34" charset="0"/>
                 <a:ea typeface="Malgun Gothic" pitchFamily="34" charset="-122"/>
@@ -7014,7 +7006,7 @@
             <a:r>
               <a:rPr lang="en-US" sz="1150" b="1" dirty="0">
                 <a:solidFill>
-                  <a:srgbClr val="1E2B5C"/>
+                  <a:srgbClr val="0F1A2E"/>
                 </a:solidFill>
                 <a:latin typeface="Malgun Gothic" pitchFamily="34" charset="0"/>
                 <a:ea typeface="Malgun Gothic" pitchFamily="34" charset="-122"/>
@@ -7123,7 +7115,7 @@
             <a:r>
               <a:rPr lang="en-US" sz="1150" b="1" dirty="0">
                 <a:solidFill>
-                  <a:srgbClr val="1E2B5C"/>
+                  <a:srgbClr val="0F1A2E"/>
                 </a:solidFill>
                 <a:latin typeface="Malgun Gothic" pitchFamily="34" charset="0"/>
                 <a:ea typeface="Malgun Gothic" pitchFamily="34" charset="-122"/>
@@ -7232,7 +7224,7 @@
             <a:r>
               <a:rPr lang="en-US" sz="1150" b="1" dirty="0">
                 <a:solidFill>
-                  <a:srgbClr val="1E2B5C"/>
+                  <a:srgbClr val="0F1A2E"/>
                 </a:solidFill>
                 <a:latin typeface="Malgun Gothic" pitchFamily="34" charset="0"/>
                 <a:ea typeface="Malgun Gothic" pitchFamily="34" charset="-122"/>
@@ -7341,7 +7333,7 @@
             <a:r>
               <a:rPr lang="en-US" sz="1150" b="1" dirty="0">
                 <a:solidFill>
-                  <a:srgbClr val="1E2B5C"/>
+                  <a:srgbClr val="0F1A2E"/>
                 </a:solidFill>
                 <a:latin typeface="Malgun Gothic" pitchFamily="34" charset="0"/>
                 <a:ea typeface="Malgun Gothic" pitchFamily="34" charset="-122"/>
@@ -7450,7 +7442,7 @@
             <a:r>
               <a:rPr lang="en-US" sz="1150" b="1" dirty="0">
                 <a:solidFill>
-                  <a:srgbClr val="1E2B5C"/>
+                  <a:srgbClr val="0F1A2E"/>
                 </a:solidFill>
                 <a:latin typeface="Malgun Gothic" pitchFamily="34" charset="0"/>
                 <a:ea typeface="Malgun Gothic" pitchFamily="34" charset="-122"/>
@@ -7562,7 +7554,7 @@
             <a:r>
               <a:rPr lang="en-US" sz="1000" b="1" dirty="0">
                 <a:solidFill>
-                  <a:srgbClr val="1E2B5C"/>
+                  <a:srgbClr val="0F1A2E"/>
                 </a:solidFill>
                 <a:latin typeface="Malgun Gothic" pitchFamily="34" charset="0"/>
                 <a:ea typeface="Malgun Gothic" pitchFamily="34" charset="-122"/>
@@ -7596,7 +7588,7 @@
             <a:r>
               <a:rPr lang="en-US" sz="1000" b="1" dirty="0">
                 <a:solidFill>
-                  <a:srgbClr val="EE7D22"/>
+                  <a:srgbClr val="1E5AF0"/>
                 </a:solidFill>
                 <a:latin typeface="Malgun Gothic" pitchFamily="34" charset="0"/>
                 <a:ea typeface="Malgun Gothic" pitchFamily="34" charset="-122"/>
@@ -7640,7 +7632,7 @@
             <a:avLst/>
           </a:prstGeom>
           <a:solidFill>
-            <a:srgbClr val="1E2B5C"/>
+            <a:srgbClr val="0F1A2E"/>
           </a:solidFill>
           <a:ln/>
         </p:spPr>
@@ -7768,7 +7760,7 @@
             <a:r>
               <a:rPr lang="en-US" sz="850" b="1" dirty="0">
                 <a:solidFill>
-                  <a:srgbClr val="EE7D22"/>
+                  <a:srgbClr val="1E5AF0"/>
                 </a:solidFill>
                 <a:latin typeface="Malgun Gothic" pitchFamily="34" charset="0"/>
                 <a:ea typeface="Malgun Gothic" pitchFamily="34" charset="-122"/>
@@ -7832,7 +7824,7 @@
             <a:r>
               <a:rPr lang="en-US" sz="1800" b="1" dirty="0">
                 <a:solidFill>
-                  <a:srgbClr val="1E2B5C"/>
+                  <a:srgbClr val="0F1A2E"/>
                 </a:solidFill>
                 <a:latin typeface="Malgun Gothic" pitchFamily="34" charset="0"/>
                 <a:ea typeface="Malgun Gothic" pitchFamily="34" charset="-122"/>
@@ -7846,7 +7838,7 @@
             <a:r>
               <a:rPr lang="en-US" sz="900" b="1" dirty="0">
                 <a:solidFill>
-                  <a:srgbClr val="EE7D22"/>
+                  <a:srgbClr val="1E5AF0"/>
                 </a:solidFill>
                 <a:latin typeface="Malgun Gothic" pitchFamily="34" charset="0"/>
                 <a:ea typeface="Malgun Gothic" pitchFamily="34" charset="-122"/>
@@ -7913,7 +7905,7 @@
             <a:r>
               <a:rPr lang="en-US" sz="900" b="1" dirty="0">
                 <a:solidFill>
-                  <a:srgbClr val="1E2B5C"/>
+                  <a:srgbClr val="0F1A2E"/>
                 </a:solidFill>
                 <a:latin typeface="Malgun Gothic" pitchFamily="34" charset="0"/>
                 <a:ea typeface="Malgun Gothic" pitchFamily="34" charset="-122"/>
@@ -7956,7 +7948,7 @@
             </a:avLst>
           </a:prstGeom>
           <a:solidFill>
-            <a:srgbClr val="1E2B5C"/>
+            <a:srgbClr val="0F1A2E"/>
           </a:solidFill>
           <a:ln/>
         </p:spPr>
@@ -8031,7 +8023,7 @@
             <a:r>
               <a:rPr lang="en-US" sz="2600" b="1" dirty="0">
                 <a:solidFill>
-                  <a:srgbClr val="1E2B5C"/>
+                  <a:srgbClr val="0F1A2E"/>
                 </a:solidFill>
                 <a:latin typeface="Malgun Gothic" pitchFamily="34" charset="0"/>
                 <a:ea typeface="Malgun Gothic" pitchFamily="34" charset="-122"/>
@@ -8099,7 +8091,7 @@
             </a:avLst>
           </a:prstGeom>
           <a:solidFill>
-            <a:srgbClr val="1E2B5C"/>
+            <a:srgbClr val="0F1A2E"/>
           </a:solidFill>
           <a:ln/>
         </p:spPr>
@@ -8205,7 +8197,7 @@
             <a:r>
               <a:rPr lang="en-US" sz="1400" b="1" dirty="0">
                 <a:solidFill>
-                  <a:srgbClr val="1E2B5C"/>
+                  <a:srgbClr val="0F1A2E"/>
                 </a:solidFill>
                 <a:latin typeface="Malgun Gothic" pitchFamily="34" charset="0"/>
                 <a:ea typeface="Malgun Gothic" pitchFamily="34" charset="-122"/>
@@ -8312,7 +8304,7 @@
             </a:avLst>
           </a:prstGeom>
           <a:solidFill>
-            <a:srgbClr val="1E2B5C"/>
+            <a:srgbClr val="0F1A2E"/>
           </a:solidFill>
           <a:ln/>
         </p:spPr>
@@ -8418,7 +8410,7 @@
             <a:r>
               <a:rPr lang="en-US" sz="1400" b="1" dirty="0">
                 <a:solidFill>
-                  <a:srgbClr val="1E2B5C"/>
+                  <a:srgbClr val="0F1A2E"/>
                 </a:solidFill>
                 <a:latin typeface="Malgun Gothic" pitchFamily="34" charset="0"/>
                 <a:ea typeface="Malgun Gothic" pitchFamily="34" charset="-122"/>
@@ -8525,7 +8517,7 @@
             </a:avLst>
           </a:prstGeom>
           <a:solidFill>
-            <a:srgbClr val="1E2B5C"/>
+            <a:srgbClr val="0F1A2E"/>
           </a:solidFill>
           <a:ln/>
         </p:spPr>
@@ -8631,7 +8623,7 @@
             <a:r>
               <a:rPr lang="en-US" sz="1400" b="1" dirty="0">
                 <a:solidFill>
-                  <a:srgbClr val="1E2B5C"/>
+                  <a:srgbClr val="0F1A2E"/>
                 </a:solidFill>
                 <a:latin typeface="Malgun Gothic" pitchFamily="34" charset="0"/>
                 <a:ea typeface="Malgun Gothic" pitchFamily="34" charset="-122"/>
@@ -8738,7 +8730,7 @@
             </a:avLst>
           </a:prstGeom>
           <a:solidFill>
-            <a:srgbClr val="1E2B5C"/>
+            <a:srgbClr val="0F1A2E"/>
           </a:solidFill>
           <a:ln/>
         </p:spPr>
@@ -8844,7 +8836,7 @@
             <a:r>
               <a:rPr lang="en-US" sz="1400" b="1" dirty="0">
                 <a:solidFill>
-                  <a:srgbClr val="1E2B5C"/>
+                  <a:srgbClr val="0F1A2E"/>
                 </a:solidFill>
                 <a:latin typeface="Malgun Gothic" pitchFamily="34" charset="0"/>
                 <a:ea typeface="Malgun Gothic" pitchFamily="34" charset="-122"/>
@@ -8912,7 +8904,7 @@
             </a:avLst>
           </a:prstGeom>
           <a:solidFill>
-            <a:srgbClr val="1E2B5C"/>
+            <a:srgbClr val="0F1A2E"/>
           </a:solidFill>
           <a:ln/>
         </p:spPr>
@@ -9041,7 +9033,7 @@
             <a:r>
               <a:rPr lang="en-US" sz="1050" b="1" dirty="0">
                 <a:solidFill>
-                  <a:srgbClr val="EE7D22"/>
+                  <a:srgbClr val="1E5AF0"/>
                 </a:solidFill>
                 <a:latin typeface="Malgun Gothic" pitchFamily="34" charset="0"/>
                 <a:ea typeface="Malgun Gothic" pitchFamily="34" charset="-122"/>
@@ -9097,7 +9089,7 @@
             <a:r>
               <a:rPr lang="en-US" sz="1400" b="1" dirty="0">
                 <a:solidFill>
-                  <a:srgbClr val="1E2B5C"/>
+                  <a:srgbClr val="0F1A2E"/>
                 </a:solidFill>
                 <a:latin typeface="Malgun Gothic" pitchFamily="34" charset="0"/>
                 <a:ea typeface="Malgun Gothic" pitchFamily="34" charset="-122"/>
@@ -9167,7 +9159,7 @@
             <a:r>
               <a:rPr lang="en-US" sz="1050" b="1" dirty="0">
                 <a:solidFill>
-                  <a:srgbClr val="1E2B5C"/>
+                  <a:srgbClr val="0F1A2E"/>
                 </a:solidFill>
                 <a:latin typeface="Malgun Gothic" pitchFamily="34" charset="0"/>
                 <a:ea typeface="Malgun Gothic" pitchFamily="34" charset="-122"/>
@@ -9276,7 +9268,7 @@
             <a:r>
               <a:rPr lang="en-US" sz="1050" b="1" dirty="0">
                 <a:solidFill>
-                  <a:srgbClr val="1E2B5C"/>
+                  <a:srgbClr val="0F1A2E"/>
                 </a:solidFill>
                 <a:latin typeface="Malgun Gothic" pitchFamily="34" charset="0"/>
                 <a:ea typeface="Malgun Gothic" pitchFamily="34" charset="-122"/>
@@ -9385,7 +9377,7 @@
             <a:r>
               <a:rPr lang="en-US" sz="1050" b="1" dirty="0">
                 <a:solidFill>
-                  <a:srgbClr val="1E2B5C"/>
+                  <a:srgbClr val="0F1A2E"/>
                 </a:solidFill>
                 <a:latin typeface="Malgun Gothic" pitchFamily="34" charset="0"/>
                 <a:ea typeface="Malgun Gothic" pitchFamily="34" charset="-122"/>
@@ -9494,7 +9486,7 @@
             <a:r>
               <a:rPr lang="en-US" sz="1050" b="1" dirty="0">
                 <a:solidFill>
-                  <a:srgbClr val="1E2B5C"/>
+                  <a:srgbClr val="0F1A2E"/>
                 </a:solidFill>
                 <a:latin typeface="Malgun Gothic" pitchFamily="34" charset="0"/>
                 <a:ea typeface="Malgun Gothic" pitchFamily="34" charset="-122"/>
@@ -9560,7 +9552,7 @@
             <a:avLst/>
           </a:prstGeom>
           <a:solidFill>
-            <a:srgbClr val="1E2B5C"/>
+            <a:srgbClr val="0F1A2E"/>
           </a:solidFill>
           <a:ln/>
         </p:spPr>
@@ -9688,7 +9680,7 @@
             <a:r>
               <a:rPr lang="en-US" sz="850" b="1" dirty="0">
                 <a:solidFill>
-                  <a:srgbClr val="EE7D22"/>
+                  <a:srgbClr val="1E5AF0"/>
                 </a:solidFill>
                 <a:latin typeface="Malgun Gothic" pitchFamily="34" charset="0"/>
                 <a:ea typeface="Malgun Gothic" pitchFamily="34" charset="-122"/>
@@ -9752,7 +9744,7 @@
             <a:r>
               <a:rPr lang="en-US" sz="1800" b="1" dirty="0">
                 <a:solidFill>
-                  <a:srgbClr val="1E2B5C"/>
+                  <a:srgbClr val="0F1A2E"/>
                 </a:solidFill>
                 <a:latin typeface="Malgun Gothic" pitchFamily="34" charset="0"/>
                 <a:ea typeface="Malgun Gothic" pitchFamily="34" charset="-122"/>
@@ -9766,7 +9758,7 @@
             <a:r>
               <a:rPr lang="en-US" sz="900" b="1" dirty="0">
                 <a:solidFill>
-                  <a:srgbClr val="EE7D22"/>
+                  <a:srgbClr val="1E5AF0"/>
                 </a:solidFill>
                 <a:latin typeface="Malgun Gothic" pitchFamily="34" charset="0"/>
                 <a:ea typeface="Malgun Gothic" pitchFamily="34" charset="-122"/>
@@ -9833,7 +9825,7 @@
             <a:r>
               <a:rPr lang="en-US" sz="900" b="1" dirty="0">
                 <a:solidFill>
-                  <a:srgbClr val="1E2B5C"/>
+                  <a:srgbClr val="0F1A2E"/>
                 </a:solidFill>
                 <a:latin typeface="Malgun Gothic" pitchFamily="34" charset="0"/>
                 <a:ea typeface="Malgun Gothic" pitchFamily="34" charset="-122"/>
@@ -9876,7 +9868,7 @@
             </a:avLst>
           </a:prstGeom>
           <a:solidFill>
-            <a:srgbClr val="1E2B5C"/>
+            <a:srgbClr val="0F1A2E"/>
           </a:solidFill>
           <a:ln/>
         </p:spPr>
@@ -9951,7 +9943,7 @@
             <a:r>
               <a:rPr lang="en-US" sz="2600" b="1" dirty="0">
                 <a:solidFill>
-                  <a:srgbClr val="1E2B5C"/>
+                  <a:srgbClr val="0F1A2E"/>
                 </a:solidFill>
                 <a:latin typeface="Malgun Gothic" pitchFamily="34" charset="0"/>
                 <a:ea typeface="Malgun Gothic" pitchFamily="34" charset="-122"/>
@@ -10094,7 +10086,7 @@
                       <a:tailEnd type="none" w="med" len="med"/>
                     </a:lnB>
                     <a:solidFill>
-                      <a:srgbClr val="1E2B5C"/>
+                      <a:srgbClr val="0F1A2E"/>
                     </a:solidFill>
                   </a:tcPr>
                 </a:tc>
@@ -10162,7 +10154,7 @@
                       <a:tailEnd type="none" w="med" len="med"/>
                     </a:lnB>
                     <a:solidFill>
-                      <a:srgbClr val="1E2B5C"/>
+                      <a:srgbClr val="0F1A2E"/>
                     </a:solidFill>
                   </a:tcPr>
                 </a:tc>
@@ -10230,7 +10222,7 @@
                       <a:tailEnd type="none" w="med" len="med"/>
                     </a:lnB>
                     <a:solidFill>
-                      <a:srgbClr val="1E2B5C"/>
+                      <a:srgbClr val="0F1A2E"/>
                     </a:solidFill>
                   </a:tcPr>
                 </a:tc>
@@ -10245,13 +10237,8 @@
                         <a:buNone/>
                       </a:pPr>
                       <a:r>
-                        <a:rPr lang="en-US" sz="950" b="1" dirty="0">
-                          <a:solidFill>
-                            <a:srgbClr val="1E2B5C"/>
-                          </a:solidFill>
-                          <a:latin typeface="Malgun Gothic" pitchFamily="34" charset="0"/>
-                          <a:ea typeface="Malgun Gothic" pitchFamily="34" charset="-122"/>
-                          <a:cs typeface="Malgun Gothic" pitchFamily="34" charset="-120"/>
+                        <a:rPr>
+                          <a:solidFill/>
                         </a:rPr>
                         <a:t>① 도로접면</a:t>
                       </a:r>
@@ -10445,13 +10432,8 @@
                         <a:buNone/>
                       </a:pPr>
                       <a:r>
-                        <a:rPr lang="en-US" sz="950" b="1" dirty="0">
-                          <a:solidFill>
-                            <a:srgbClr val="1E2B5C"/>
-                          </a:solidFill>
-                          <a:latin typeface="Malgun Gothic" pitchFamily="34" charset="0"/>
-                          <a:ea typeface="Malgun Gothic" pitchFamily="34" charset="-122"/>
-                          <a:cs typeface="Malgun Gothic" pitchFamily="34" charset="-120"/>
+                        <a:rPr>
+                          <a:solidFill/>
                         </a:rPr>
                         <a:t>② 역과의거리</a:t>
                       </a:r>
@@ -10515,7 +10497,7 @@
                       <a:r>
                         <a:rPr lang="en-US" sz="950" b="1" dirty="0">
                           <a:solidFill>
-                            <a:srgbClr val="EE7D22"/>
+                            <a:srgbClr val="1E5AF0"/>
                           </a:solidFill>
                           <a:latin typeface="Malgun Gothic" pitchFamily="34" charset="0"/>
                           <a:ea typeface="Malgun Gothic" pitchFamily="34" charset="-122"/>
@@ -10645,15 +10627,400 @@
                         <a:buNone/>
                       </a:pPr>
                       <a:r>
+                        <a:rPr>
+                          <a:solidFill/>
+                        </a:rPr>
+                        <a:t>③ 용도지역</a:t>
+                      </a:r>
+                      <a:endParaRPr lang="en-US" sz="950" dirty="0">
+                        <a:latin typeface="Malgun Gothic" charset="0"/>
+                        <a:ea typeface="Malgun Gothic" charset="0"/>
+                        <a:cs typeface="Malgun Gothic" charset="0"/>
+                      </a:endParaRPr>
+                    </a:p>
+                  </a:txBody>
+                  <a:tcPr marL="73152" marR="73152" marT="18288" marB="18288" anchor="ctr">
+                    <a:lnL w="6350" cap="flat" cmpd="sng" algn="ctr">
+                      <a:solidFill>
+                        <a:srgbClr val="D9DEE8"/>
+                      </a:solidFill>
+                      <a:prstDash val="solid"/>
+                      <a:round/>
+                      <a:headEnd type="none" w="med" len="med"/>
+                      <a:tailEnd type="none" w="med" len="med"/>
+                    </a:lnL>
+                    <a:lnR w="6350" cap="flat" cmpd="sng" algn="ctr">
+                      <a:solidFill>
+                        <a:srgbClr val="D9DEE8"/>
+                      </a:solidFill>
+                      <a:prstDash val="solid"/>
+                      <a:round/>
+                      <a:headEnd type="none" w="med" len="med"/>
+                      <a:tailEnd type="none" w="med" len="med"/>
+                    </a:lnR>
+                    <a:lnT w="6350" cap="flat" cmpd="sng" algn="ctr">
+                      <a:solidFill>
+                        <a:srgbClr val="D9DEE8"/>
+                      </a:solidFill>
+                      <a:prstDash val="solid"/>
+                      <a:round/>
+                      <a:headEnd type="none" w="med" len="med"/>
+                      <a:tailEnd type="none" w="med" len="med"/>
+                    </a:lnT>
+                    <a:lnB w="6350" cap="flat" cmpd="sng" algn="ctr">
+                      <a:solidFill>
+                        <a:srgbClr val="D9DEE8"/>
+                      </a:solidFill>
+                      <a:prstDash val="solid"/>
+                      <a:round/>
+                      <a:headEnd type="none" w="med" len="med"/>
+                      <a:tailEnd type="none" w="med" len="med"/>
+                    </a:lnB>
+                    <a:solidFill>
+                      <a:srgbClr val="F4F6FB"/>
+                    </a:solidFill>
+                  </a:tcPr>
+                </a:tc>
+                <a:tc>
+                  <a:txBody>
+                    <a:bodyPr/>
+                    <a:lstStyle/>
+                    <a:p>
+                      <a:pPr algn="ctr" indent="0" marL="0">
+                        <a:buNone/>
+                      </a:pPr>
+                      <a:r>
                         <a:rPr lang="en-US" sz="950" b="1" dirty="0">
                           <a:solidFill>
-                            <a:srgbClr val="1E2B5C"/>
+                            <a:srgbClr val="1E5AF0"/>
                           </a:solidFill>
                           <a:latin typeface="Malgun Gothic" pitchFamily="34" charset="0"/>
                           <a:ea typeface="Malgun Gothic" pitchFamily="34" charset="-122"/>
                           <a:cs typeface="Malgun Gothic" pitchFamily="34" charset="-120"/>
                         </a:rPr>
-                        <a:t>③ 유동인구</a:t>
+                        <a:t>매우 우수</a:t>
+                      </a:r>
+                      <a:endParaRPr lang="en-US" sz="950" dirty="0">
+                        <a:latin typeface="Malgun Gothic" charset="0"/>
+                        <a:ea typeface="Malgun Gothic" charset="0"/>
+                        <a:cs typeface="Malgun Gothic" charset="0"/>
+                      </a:endParaRPr>
+                    </a:p>
+                  </a:txBody>
+                  <a:tcPr marL="73152" marR="73152" marT="18288" marB="18288" anchor="ctr">
+                    <a:lnL w="6350" cap="flat" cmpd="sng" algn="ctr">
+                      <a:solidFill>
+                        <a:srgbClr val="D9DEE8"/>
+                      </a:solidFill>
+                      <a:prstDash val="solid"/>
+                      <a:round/>
+                      <a:headEnd type="none" w="med" len="med"/>
+                      <a:tailEnd type="none" w="med" len="med"/>
+                    </a:lnL>
+                    <a:lnR w="6350" cap="flat" cmpd="sng" algn="ctr">
+                      <a:solidFill>
+                        <a:srgbClr val="D9DEE8"/>
+                      </a:solidFill>
+                      <a:prstDash val="solid"/>
+                      <a:round/>
+                      <a:headEnd type="none" w="med" len="med"/>
+                      <a:tailEnd type="none" w="med" len="med"/>
+                    </a:lnR>
+                    <a:lnT w="6350" cap="flat" cmpd="sng" algn="ctr">
+                      <a:solidFill>
+                        <a:srgbClr val="D9DEE8"/>
+                      </a:solidFill>
+                      <a:prstDash val="solid"/>
+                      <a:round/>
+                      <a:headEnd type="none" w="med" len="med"/>
+                      <a:tailEnd type="none" w="med" len="med"/>
+                    </a:lnT>
+                    <a:lnB w="6350" cap="flat" cmpd="sng" algn="ctr">
+                      <a:solidFill>
+                        <a:srgbClr val="D9DEE8"/>
+                      </a:solidFill>
+                      <a:prstDash val="solid"/>
+                      <a:round/>
+                      <a:headEnd type="none" w="med" len="med"/>
+                      <a:tailEnd type="none" w="med" len="med"/>
+                    </a:lnB>
+                  </a:tcPr>
+                </a:tc>
+                <a:tc>
+                  <a:txBody>
+                    <a:bodyPr/>
+                    <a:lstStyle/>
+                    <a:p>
+                      <a:pPr indent="0" marL="0">
+                        <a:buNone/>
+                      </a:pPr>
+                      <a:r>
+                        <a:rPr lang="en-US" sz="950" dirty="0">
+                          <a:solidFill>
+                            <a:srgbClr val="333333"/>
+                          </a:solidFill>
+                          <a:latin typeface="Malgun Gothic" pitchFamily="34" charset="0"/>
+                          <a:ea typeface="Malgun Gothic" pitchFamily="34" charset="-122"/>
+                          <a:cs typeface="Malgun Gothic" pitchFamily="34" charset="-120"/>
+                        </a:rPr>
+                        <a:t>일반상업지역으로 활용성과 거래 선호도 우수</a:t>
+                      </a:r>
+                      <a:endParaRPr lang="en-US" sz="950" dirty="0">
+                        <a:latin typeface="Malgun Gothic" charset="0"/>
+                        <a:ea typeface="Malgun Gothic" charset="0"/>
+                        <a:cs typeface="Malgun Gothic" charset="0"/>
+                      </a:endParaRPr>
+                    </a:p>
+                  </a:txBody>
+                  <a:tcPr marL="73152" marR="73152" marT="18288" marB="18288" anchor="ctr">
+                    <a:lnL w="6350" cap="flat" cmpd="sng" algn="ctr">
+                      <a:solidFill>
+                        <a:srgbClr val="D9DEE8"/>
+                      </a:solidFill>
+                      <a:prstDash val="solid"/>
+                      <a:round/>
+                      <a:headEnd type="none" w="med" len="med"/>
+                      <a:tailEnd type="none" w="med" len="med"/>
+                    </a:lnL>
+                    <a:lnR w="6350" cap="flat" cmpd="sng" algn="ctr">
+                      <a:solidFill>
+                        <a:srgbClr val="D9DEE8"/>
+                      </a:solidFill>
+                      <a:prstDash val="solid"/>
+                      <a:round/>
+                      <a:headEnd type="none" w="med" len="med"/>
+                      <a:tailEnd type="none" w="med" len="med"/>
+                    </a:lnR>
+                    <a:lnT w="6350" cap="flat" cmpd="sng" algn="ctr">
+                      <a:solidFill>
+                        <a:srgbClr val="D9DEE8"/>
+                      </a:solidFill>
+                      <a:prstDash val="solid"/>
+                      <a:round/>
+                      <a:headEnd type="none" w="med" len="med"/>
+                      <a:tailEnd type="none" w="med" len="med"/>
+                    </a:lnT>
+                    <a:lnB w="6350" cap="flat" cmpd="sng" algn="ctr">
+                      <a:solidFill>
+                        <a:srgbClr val="D9DEE8"/>
+                      </a:solidFill>
+                      <a:prstDash val="solid"/>
+                      <a:round/>
+                      <a:headEnd type="none" w="med" len="med"/>
+                      <a:tailEnd type="none" w="med" len="med"/>
+                    </a:lnB>
+                  </a:tcPr>
+                </a:tc>
+              </a:tr>
+              <a:tr h="429768">
+                <a:tc>
+                  <a:txBody>
+                    <a:bodyPr/>
+                    <a:lstStyle/>
+                    <a:p>
+                      <a:pPr indent="0" marL="0">
+                        <a:buNone/>
+                      </a:pPr>
+                      <a:r>
+                        <a:rPr>
+                          <a:solidFill/>
+                        </a:rPr>
+                        <a:t>④ 사용승인일</a:t>
+                      </a:r>
+                      <a:endParaRPr lang="en-US" sz="950" dirty="0">
+                        <a:latin typeface="Malgun Gothic" charset="0"/>
+                        <a:ea typeface="Malgun Gothic" charset="0"/>
+                        <a:cs typeface="Malgun Gothic" charset="0"/>
+                      </a:endParaRPr>
+                    </a:p>
+                  </a:txBody>
+                  <a:tcPr marL="73152" marR="73152" marT="18288" marB="18288" anchor="ctr">
+                    <a:lnL w="6350" cap="flat" cmpd="sng" algn="ctr">
+                      <a:solidFill>
+                        <a:srgbClr val="D9DEE8"/>
+                      </a:solidFill>
+                      <a:prstDash val="solid"/>
+                      <a:round/>
+                      <a:headEnd type="none" w="med" len="med"/>
+                      <a:tailEnd type="none" w="med" len="med"/>
+                    </a:lnL>
+                    <a:lnR w="6350" cap="flat" cmpd="sng" algn="ctr">
+                      <a:solidFill>
+                        <a:srgbClr val="D9DEE8"/>
+                      </a:solidFill>
+                      <a:prstDash val="solid"/>
+                      <a:round/>
+                      <a:headEnd type="none" w="med" len="med"/>
+                      <a:tailEnd type="none" w="med" len="med"/>
+                    </a:lnR>
+                    <a:lnT w="6350" cap="flat" cmpd="sng" algn="ctr">
+                      <a:solidFill>
+                        <a:srgbClr val="D9DEE8"/>
+                      </a:solidFill>
+                      <a:prstDash val="solid"/>
+                      <a:round/>
+                      <a:headEnd type="none" w="med" len="med"/>
+                      <a:tailEnd type="none" w="med" len="med"/>
+                    </a:lnT>
+                    <a:lnB w="6350" cap="flat" cmpd="sng" algn="ctr">
+                      <a:solidFill>
+                        <a:srgbClr val="D9DEE8"/>
+                      </a:solidFill>
+                      <a:prstDash val="solid"/>
+                      <a:round/>
+                      <a:headEnd type="none" w="med" len="med"/>
+                      <a:tailEnd type="none" w="med" len="med"/>
+                    </a:lnB>
+                    <a:solidFill>
+                      <a:srgbClr val="F4F6FB"/>
+                    </a:solidFill>
+                  </a:tcPr>
+                </a:tc>
+                <a:tc>
+                  <a:txBody>
+                    <a:bodyPr/>
+                    <a:lstStyle/>
+                    <a:p>
+                      <a:pPr algn="ctr" indent="0" marL="0">
+                        <a:buNone/>
+                      </a:pPr>
+                      <a:r>
+                        <a:rPr lang="en-US" sz="950" b="1" dirty="0">
+                          <a:solidFill>
+                            <a:srgbClr val="6B7280"/>
+                          </a:solidFill>
+                          <a:latin typeface="Malgun Gothic" pitchFamily="34" charset="0"/>
+                          <a:ea typeface="Malgun Gothic" pitchFamily="34" charset="-122"/>
+                          <a:cs typeface="Malgun Gothic" pitchFamily="34" charset="-120"/>
+                        </a:rPr>
+                        <a:t>보통</a:t>
+                      </a:r>
+                      <a:endParaRPr lang="en-US" sz="950" dirty="0">
+                        <a:latin typeface="Malgun Gothic" charset="0"/>
+                        <a:ea typeface="Malgun Gothic" charset="0"/>
+                        <a:cs typeface="Malgun Gothic" charset="0"/>
+                      </a:endParaRPr>
+                    </a:p>
+                  </a:txBody>
+                  <a:tcPr marL="73152" marR="73152" marT="18288" marB="18288" anchor="ctr">
+                    <a:lnL w="6350" cap="flat" cmpd="sng" algn="ctr">
+                      <a:solidFill>
+                        <a:srgbClr val="D9DEE8"/>
+                      </a:solidFill>
+                      <a:prstDash val="solid"/>
+                      <a:round/>
+                      <a:headEnd type="none" w="med" len="med"/>
+                      <a:tailEnd type="none" w="med" len="med"/>
+                    </a:lnL>
+                    <a:lnR w="6350" cap="flat" cmpd="sng" algn="ctr">
+                      <a:solidFill>
+                        <a:srgbClr val="D9DEE8"/>
+                      </a:solidFill>
+                      <a:prstDash val="solid"/>
+                      <a:round/>
+                      <a:headEnd type="none" w="med" len="med"/>
+                      <a:tailEnd type="none" w="med" len="med"/>
+                    </a:lnR>
+                    <a:lnT w="6350" cap="flat" cmpd="sng" algn="ctr">
+                      <a:solidFill>
+                        <a:srgbClr val="D9DEE8"/>
+                      </a:solidFill>
+                      <a:prstDash val="solid"/>
+                      <a:round/>
+                      <a:headEnd type="none" w="med" len="med"/>
+                      <a:tailEnd type="none" w="med" len="med"/>
+                    </a:lnT>
+                    <a:lnB w="6350" cap="flat" cmpd="sng" algn="ctr">
+                      <a:solidFill>
+                        <a:srgbClr val="D9DEE8"/>
+                      </a:solidFill>
+                      <a:prstDash val="solid"/>
+                      <a:round/>
+                      <a:headEnd type="none" w="med" len="med"/>
+                      <a:tailEnd type="none" w="med" len="med"/>
+                    </a:lnB>
+                  </a:tcPr>
+                </a:tc>
+                <a:tc>
+                  <a:txBody>
+                    <a:bodyPr/>
+                    <a:lstStyle/>
+                    <a:p>
+                      <a:pPr indent="0" marL="0">
+                        <a:buNone/>
+                      </a:pPr>
+                      <a:r>
+                        <a:rPr lang="en-US" sz="950" dirty="0">
+                          <a:solidFill>
+                            <a:srgbClr val="333333"/>
+                          </a:solidFill>
+                          <a:latin typeface="Malgun Gothic" pitchFamily="34" charset="0"/>
+                          <a:ea typeface="Malgun Gothic" pitchFamily="34" charset="-122"/>
+                          <a:cs typeface="Malgun Gothic" pitchFamily="34" charset="-120"/>
+                        </a:rPr>
+                        <a:t>2004년 사용승인 건물로 관리상태 확인 필요</a:t>
+                      </a:r>
+                      <a:endParaRPr lang="en-US" sz="950" dirty="0">
+                        <a:latin typeface="Malgun Gothic" charset="0"/>
+                        <a:ea typeface="Malgun Gothic" charset="0"/>
+                        <a:cs typeface="Malgun Gothic" charset="0"/>
+                      </a:endParaRPr>
+                    </a:p>
+                  </a:txBody>
+                  <a:tcPr marL="73152" marR="73152" marT="18288" marB="18288" anchor="ctr">
+                    <a:lnL w="6350" cap="flat" cmpd="sng" algn="ctr">
+                      <a:solidFill>
+                        <a:srgbClr val="D9DEE8"/>
+                      </a:solidFill>
+                      <a:prstDash val="solid"/>
+                      <a:round/>
+                      <a:headEnd type="none" w="med" len="med"/>
+                      <a:tailEnd type="none" w="med" len="med"/>
+                    </a:lnL>
+                    <a:lnR w="6350" cap="flat" cmpd="sng" algn="ctr">
+                      <a:solidFill>
+                        <a:srgbClr val="D9DEE8"/>
+                      </a:solidFill>
+                      <a:prstDash val="solid"/>
+                      <a:round/>
+                      <a:headEnd type="none" w="med" len="med"/>
+                      <a:tailEnd type="none" w="med" len="med"/>
+                    </a:lnR>
+                    <a:lnT w="6350" cap="flat" cmpd="sng" algn="ctr">
+                      <a:solidFill>
+                        <a:srgbClr val="D9DEE8"/>
+                      </a:solidFill>
+                      <a:prstDash val="solid"/>
+                      <a:round/>
+                      <a:headEnd type="none" w="med" len="med"/>
+                      <a:tailEnd type="none" w="med" len="med"/>
+                    </a:lnT>
+                    <a:lnB w="6350" cap="flat" cmpd="sng" algn="ctr">
+                      <a:solidFill>
+                        <a:srgbClr val="D9DEE8"/>
+                      </a:solidFill>
+                      <a:prstDash val="solid"/>
+                      <a:round/>
+                      <a:headEnd type="none" w="med" len="med"/>
+                      <a:tailEnd type="none" w="med" len="med"/>
+                    </a:lnB>
+                  </a:tcPr>
+                </a:tc>
+              </a:tr>
+              <a:tr h="429768">
+                <a:tc>
+                  <a:txBody>
+                    <a:bodyPr/>
+                    <a:lstStyle/>
+                    <a:p>
+                      <a:pPr indent="0" marL="0">
+                        <a:buNone/>
+                      </a:pPr>
+                      <a:r>
+                        <a:rPr>
+                          <a:solidFill/>
+                        </a:rPr>
+                        <a:t>⑤ 엘리베이터</a:t>
                       </a:r>
                       <a:endParaRPr lang="en-US" sz="950" dirty="0">
                         <a:latin typeface="Malgun Gothic" charset="0"/>
@@ -10786,7 +11153,7 @@
                           <a:ea typeface="Malgun Gothic" pitchFamily="34" charset="-122"/>
                           <a:cs typeface="Malgun Gothic" pitchFamily="34" charset="-120"/>
                         </a:rPr>
-                        <a:t>테헤란로 배후 수요와 근린상권 수요 확보 가능</a:t>
+                        <a:t>승강기 1대 보유로 상층부 접근성 확보</a:t>
                       </a:r>
                       <a:endParaRPr lang="en-US" sz="950" dirty="0">
                         <a:latin typeface="Malgun Gothic" charset="0"/>
@@ -10845,215 +11212,10 @@
                         <a:buNone/>
                       </a:pPr>
                       <a:r>
-                        <a:rPr lang="en-US" sz="950" b="1" dirty="0">
-                          <a:solidFill>
-                            <a:srgbClr val="1E2B5C"/>
-                          </a:solidFill>
-                          <a:latin typeface="Malgun Gothic" pitchFamily="34" charset="0"/>
-                          <a:ea typeface="Malgun Gothic" pitchFamily="34" charset="-122"/>
-                          <a:cs typeface="Malgun Gothic" pitchFamily="34" charset="-120"/>
+                        <a:rPr>
+                          <a:solidFill/>
                         </a:rPr>
-                        <a:t>④ 용도지역</a:t>
-                      </a:r>
-                      <a:endParaRPr lang="en-US" sz="950" dirty="0">
-                        <a:latin typeface="Malgun Gothic" charset="0"/>
-                        <a:ea typeface="Malgun Gothic" charset="0"/>
-                        <a:cs typeface="Malgun Gothic" charset="0"/>
-                      </a:endParaRPr>
-                    </a:p>
-                  </a:txBody>
-                  <a:tcPr marL="73152" marR="73152" marT="18288" marB="18288" anchor="ctr">
-                    <a:lnL w="6350" cap="flat" cmpd="sng" algn="ctr">
-                      <a:solidFill>
-                        <a:srgbClr val="D9DEE8"/>
-                      </a:solidFill>
-                      <a:prstDash val="solid"/>
-                      <a:round/>
-                      <a:headEnd type="none" w="med" len="med"/>
-                      <a:tailEnd type="none" w="med" len="med"/>
-                    </a:lnL>
-                    <a:lnR w="6350" cap="flat" cmpd="sng" algn="ctr">
-                      <a:solidFill>
-                        <a:srgbClr val="D9DEE8"/>
-                      </a:solidFill>
-                      <a:prstDash val="solid"/>
-                      <a:round/>
-                      <a:headEnd type="none" w="med" len="med"/>
-                      <a:tailEnd type="none" w="med" len="med"/>
-                    </a:lnR>
-                    <a:lnT w="6350" cap="flat" cmpd="sng" algn="ctr">
-                      <a:solidFill>
-                        <a:srgbClr val="D9DEE8"/>
-                      </a:solidFill>
-                      <a:prstDash val="solid"/>
-                      <a:round/>
-                      <a:headEnd type="none" w="med" len="med"/>
-                      <a:tailEnd type="none" w="med" len="med"/>
-                    </a:lnT>
-                    <a:lnB w="6350" cap="flat" cmpd="sng" algn="ctr">
-                      <a:solidFill>
-                        <a:srgbClr val="D9DEE8"/>
-                      </a:solidFill>
-                      <a:prstDash val="solid"/>
-                      <a:round/>
-                      <a:headEnd type="none" w="med" len="med"/>
-                      <a:tailEnd type="none" w="med" len="med"/>
-                    </a:lnB>
-                    <a:solidFill>
-                      <a:srgbClr val="F4F6FB"/>
-                    </a:solidFill>
-                  </a:tcPr>
-                </a:tc>
-                <a:tc>
-                  <a:txBody>
-                    <a:bodyPr/>
-                    <a:lstStyle/>
-                    <a:p>
-                      <a:pPr algn="ctr" indent="0" marL="0">
-                        <a:buNone/>
-                      </a:pPr>
-                      <a:r>
-                        <a:rPr lang="en-US" sz="950" b="1" dirty="0">
-                          <a:solidFill>
-                            <a:srgbClr val="EE7D22"/>
-                          </a:solidFill>
-                          <a:latin typeface="Malgun Gothic" pitchFamily="34" charset="0"/>
-                          <a:ea typeface="Malgun Gothic" pitchFamily="34" charset="-122"/>
-                          <a:cs typeface="Malgun Gothic" pitchFamily="34" charset="-120"/>
-                        </a:rPr>
-                        <a:t>매우 우수</a:t>
-                      </a:r>
-                      <a:endParaRPr lang="en-US" sz="950" dirty="0">
-                        <a:latin typeface="Malgun Gothic" charset="0"/>
-                        <a:ea typeface="Malgun Gothic" charset="0"/>
-                        <a:cs typeface="Malgun Gothic" charset="0"/>
-                      </a:endParaRPr>
-                    </a:p>
-                  </a:txBody>
-                  <a:tcPr marL="73152" marR="73152" marT="18288" marB="18288" anchor="ctr">
-                    <a:lnL w="6350" cap="flat" cmpd="sng" algn="ctr">
-                      <a:solidFill>
-                        <a:srgbClr val="D9DEE8"/>
-                      </a:solidFill>
-                      <a:prstDash val="solid"/>
-                      <a:round/>
-                      <a:headEnd type="none" w="med" len="med"/>
-                      <a:tailEnd type="none" w="med" len="med"/>
-                    </a:lnL>
-                    <a:lnR w="6350" cap="flat" cmpd="sng" algn="ctr">
-                      <a:solidFill>
-                        <a:srgbClr val="D9DEE8"/>
-                      </a:solidFill>
-                      <a:prstDash val="solid"/>
-                      <a:round/>
-                      <a:headEnd type="none" w="med" len="med"/>
-                      <a:tailEnd type="none" w="med" len="med"/>
-                    </a:lnR>
-                    <a:lnT w="6350" cap="flat" cmpd="sng" algn="ctr">
-                      <a:solidFill>
-                        <a:srgbClr val="D9DEE8"/>
-                      </a:solidFill>
-                      <a:prstDash val="solid"/>
-                      <a:round/>
-                      <a:headEnd type="none" w="med" len="med"/>
-                      <a:tailEnd type="none" w="med" len="med"/>
-                    </a:lnT>
-                    <a:lnB w="6350" cap="flat" cmpd="sng" algn="ctr">
-                      <a:solidFill>
-                        <a:srgbClr val="D9DEE8"/>
-                      </a:solidFill>
-                      <a:prstDash val="solid"/>
-                      <a:round/>
-                      <a:headEnd type="none" w="med" len="med"/>
-                      <a:tailEnd type="none" w="med" len="med"/>
-                    </a:lnB>
-                  </a:tcPr>
-                </a:tc>
-                <a:tc>
-                  <a:txBody>
-                    <a:bodyPr/>
-                    <a:lstStyle/>
-                    <a:p>
-                      <a:pPr indent="0" marL="0">
-                        <a:buNone/>
-                      </a:pPr>
-                      <a:r>
-                        <a:rPr lang="en-US" sz="950" dirty="0">
-                          <a:solidFill>
-                            <a:srgbClr val="333333"/>
-                          </a:solidFill>
-                          <a:latin typeface="Malgun Gothic" pitchFamily="34" charset="0"/>
-                          <a:ea typeface="Malgun Gothic" pitchFamily="34" charset="-122"/>
-                          <a:cs typeface="Malgun Gothic" pitchFamily="34" charset="-120"/>
-                        </a:rPr>
-                        <a:t>일반상업지역으로 활용성과 거래 선호도 우수</a:t>
-                      </a:r>
-                      <a:endParaRPr lang="en-US" sz="950" dirty="0">
-                        <a:latin typeface="Malgun Gothic" charset="0"/>
-                        <a:ea typeface="Malgun Gothic" charset="0"/>
-                        <a:cs typeface="Malgun Gothic" charset="0"/>
-                      </a:endParaRPr>
-                    </a:p>
-                  </a:txBody>
-                  <a:tcPr marL="73152" marR="73152" marT="18288" marB="18288" anchor="ctr">
-                    <a:lnL w="6350" cap="flat" cmpd="sng" algn="ctr">
-                      <a:solidFill>
-                        <a:srgbClr val="D9DEE8"/>
-                      </a:solidFill>
-                      <a:prstDash val="solid"/>
-                      <a:round/>
-                      <a:headEnd type="none" w="med" len="med"/>
-                      <a:tailEnd type="none" w="med" len="med"/>
-                    </a:lnL>
-                    <a:lnR w="6350" cap="flat" cmpd="sng" algn="ctr">
-                      <a:solidFill>
-                        <a:srgbClr val="D9DEE8"/>
-                      </a:solidFill>
-                      <a:prstDash val="solid"/>
-                      <a:round/>
-                      <a:headEnd type="none" w="med" len="med"/>
-                      <a:tailEnd type="none" w="med" len="med"/>
-                    </a:lnR>
-                    <a:lnT w="6350" cap="flat" cmpd="sng" algn="ctr">
-                      <a:solidFill>
-                        <a:srgbClr val="D9DEE8"/>
-                      </a:solidFill>
-                      <a:prstDash val="solid"/>
-                      <a:round/>
-                      <a:headEnd type="none" w="med" len="med"/>
-                      <a:tailEnd type="none" w="med" len="med"/>
-                    </a:lnT>
-                    <a:lnB w="6350" cap="flat" cmpd="sng" algn="ctr">
-                      <a:solidFill>
-                        <a:srgbClr val="D9DEE8"/>
-                      </a:solidFill>
-                      <a:prstDash val="solid"/>
-                      <a:round/>
-                      <a:headEnd type="none" w="med" len="med"/>
-                      <a:tailEnd type="none" w="med" len="med"/>
-                    </a:lnB>
-                  </a:tcPr>
-                </a:tc>
-              </a:tr>
-              <a:tr h="429768">
-                <a:tc>
-                  <a:txBody>
-                    <a:bodyPr/>
-                    <a:lstStyle/>
-                    <a:p>
-                      <a:pPr indent="0" marL="0">
-                        <a:buNone/>
-                      </a:pPr>
-                      <a:r>
-                        <a:rPr lang="en-US" sz="950" b="1" dirty="0">
-                          <a:solidFill>
-                            <a:srgbClr val="1E2B5C"/>
-                          </a:solidFill>
-                          <a:latin typeface="Malgun Gothic" pitchFamily="34" charset="0"/>
-                          <a:ea typeface="Malgun Gothic" pitchFamily="34" charset="-122"/>
-                          <a:cs typeface="Malgun Gothic" pitchFamily="34" charset="-120"/>
-                        </a:rPr>
-                        <a:t>⑤ 사용승인일</a:t>
+                        <a:t>⑥ 대수선·리모델링</a:t>
                       </a:r>
                       <a:endParaRPr lang="en-US" sz="950" dirty="0">
                         <a:latin typeface="Malgun Gothic" charset="0"/>
@@ -11186,7 +11348,7 @@
                           <a:ea typeface="Malgun Gothic" pitchFamily="34" charset="-122"/>
                           <a:cs typeface="Malgun Gothic" pitchFamily="34" charset="-120"/>
                         </a:rPr>
-                        <a:t>2004년 사용승인 건물로 관리상태 확인 필요</a:t>
+                        <a:t>향후 개선 여부에 따라 임대 경쟁력 보완 가능</a:t>
                       </a:r>
                       <a:endParaRPr lang="en-US" sz="950" dirty="0">
                         <a:latin typeface="Malgun Gothic" charset="0"/>
@@ -11245,15 +11407,10 @@
                         <a:buNone/>
                       </a:pPr>
                       <a:r>
-                        <a:rPr lang="en-US" sz="950" b="1" dirty="0">
-                          <a:solidFill>
-                            <a:srgbClr val="1E2B5C"/>
-                          </a:solidFill>
-                          <a:latin typeface="Malgun Gothic" pitchFamily="34" charset="0"/>
-                          <a:ea typeface="Malgun Gothic" pitchFamily="34" charset="-122"/>
-                          <a:cs typeface="Malgun Gothic" pitchFamily="34" charset="-120"/>
+                        <a:rPr>
+                          <a:solidFill/>
                         </a:rPr>
-                        <a:t>⑥ 엘리베이터</a:t>
+                        <a:t>⑦ 지형형상</a:t>
                       </a:r>
                       <a:endParaRPr lang="en-US" sz="950" dirty="0">
                         <a:latin typeface="Malgun Gothic" charset="0"/>
@@ -11386,7 +11543,7 @@
                           <a:ea typeface="Malgun Gothic" pitchFamily="34" charset="-122"/>
                           <a:cs typeface="Malgun Gothic" pitchFamily="34" charset="-120"/>
                         </a:rPr>
-                        <a:t>승강기 1대 보유로 상층부 접근성 확보</a:t>
+                        <a:t>코너 필지로 토지 활용성 양호</a:t>
                       </a:r>
                       <a:endParaRPr lang="en-US" sz="950" dirty="0">
                         <a:latin typeface="Malgun Gothic" charset="0"/>
@@ -11445,15 +11602,10 @@
                         <a:buNone/>
                       </a:pPr>
                       <a:r>
-                        <a:rPr lang="en-US" sz="950" b="1" dirty="0">
-                          <a:solidFill>
-                            <a:srgbClr val="1E2B5C"/>
-                          </a:solidFill>
-                          <a:latin typeface="Malgun Gothic" pitchFamily="34" charset="0"/>
-                          <a:ea typeface="Malgun Gothic" pitchFamily="34" charset="-122"/>
-                          <a:cs typeface="Malgun Gothic" pitchFamily="34" charset="-120"/>
+                        <a:rPr>
+                          <a:solidFill/>
                         </a:rPr>
-                        <a:t>⑦ 대수선·리모델링</a:t>
+                        <a:t>⑧ 경사도</a:t>
                       </a:r>
                       <a:endParaRPr lang="en-US" sz="950" dirty="0">
                         <a:latin typeface="Malgun Gothic" charset="0"/>
@@ -11586,406 +11738,6 @@
                           <a:ea typeface="Malgun Gothic" pitchFamily="34" charset="-122"/>
                           <a:cs typeface="Malgun Gothic" pitchFamily="34" charset="-120"/>
                         </a:rPr>
-                        <a:t>향후 개선 여부에 따라 임대 경쟁력 보완 가능</a:t>
-                      </a:r>
-                      <a:endParaRPr lang="en-US" sz="950" dirty="0">
-                        <a:latin typeface="Malgun Gothic" charset="0"/>
-                        <a:ea typeface="Malgun Gothic" charset="0"/>
-                        <a:cs typeface="Malgun Gothic" charset="0"/>
-                      </a:endParaRPr>
-                    </a:p>
-                  </a:txBody>
-                  <a:tcPr marL="73152" marR="73152" marT="18288" marB="18288" anchor="ctr">
-                    <a:lnL w="6350" cap="flat" cmpd="sng" algn="ctr">
-                      <a:solidFill>
-                        <a:srgbClr val="D9DEE8"/>
-                      </a:solidFill>
-                      <a:prstDash val="solid"/>
-                      <a:round/>
-                      <a:headEnd type="none" w="med" len="med"/>
-                      <a:tailEnd type="none" w="med" len="med"/>
-                    </a:lnL>
-                    <a:lnR w="6350" cap="flat" cmpd="sng" algn="ctr">
-                      <a:solidFill>
-                        <a:srgbClr val="D9DEE8"/>
-                      </a:solidFill>
-                      <a:prstDash val="solid"/>
-                      <a:round/>
-                      <a:headEnd type="none" w="med" len="med"/>
-                      <a:tailEnd type="none" w="med" len="med"/>
-                    </a:lnR>
-                    <a:lnT w="6350" cap="flat" cmpd="sng" algn="ctr">
-                      <a:solidFill>
-                        <a:srgbClr val="D9DEE8"/>
-                      </a:solidFill>
-                      <a:prstDash val="solid"/>
-                      <a:round/>
-                      <a:headEnd type="none" w="med" len="med"/>
-                      <a:tailEnd type="none" w="med" len="med"/>
-                    </a:lnT>
-                    <a:lnB w="6350" cap="flat" cmpd="sng" algn="ctr">
-                      <a:solidFill>
-                        <a:srgbClr val="D9DEE8"/>
-                      </a:solidFill>
-                      <a:prstDash val="solid"/>
-                      <a:round/>
-                      <a:headEnd type="none" w="med" len="med"/>
-                      <a:tailEnd type="none" w="med" len="med"/>
-                    </a:lnB>
-                  </a:tcPr>
-                </a:tc>
-              </a:tr>
-              <a:tr h="429768">
-                <a:tc>
-                  <a:txBody>
-                    <a:bodyPr/>
-                    <a:lstStyle/>
-                    <a:p>
-                      <a:pPr indent="0" marL="0">
-                        <a:buNone/>
-                      </a:pPr>
-                      <a:r>
-                        <a:rPr lang="en-US" sz="950" b="1" dirty="0">
-                          <a:solidFill>
-                            <a:srgbClr val="1E2B5C"/>
-                          </a:solidFill>
-                          <a:latin typeface="Malgun Gothic" pitchFamily="34" charset="0"/>
-                          <a:ea typeface="Malgun Gothic" pitchFamily="34" charset="-122"/>
-                          <a:cs typeface="Malgun Gothic" pitchFamily="34" charset="-120"/>
-                        </a:rPr>
-                        <a:t>⑧ 지형형상</a:t>
-                      </a:r>
-                      <a:endParaRPr lang="en-US" sz="950" dirty="0">
-                        <a:latin typeface="Malgun Gothic" charset="0"/>
-                        <a:ea typeface="Malgun Gothic" charset="0"/>
-                        <a:cs typeface="Malgun Gothic" charset="0"/>
-                      </a:endParaRPr>
-                    </a:p>
-                  </a:txBody>
-                  <a:tcPr marL="73152" marR="73152" marT="18288" marB="18288" anchor="ctr">
-                    <a:lnL w="6350" cap="flat" cmpd="sng" algn="ctr">
-                      <a:solidFill>
-                        <a:srgbClr val="D9DEE8"/>
-                      </a:solidFill>
-                      <a:prstDash val="solid"/>
-                      <a:round/>
-                      <a:headEnd type="none" w="med" len="med"/>
-                      <a:tailEnd type="none" w="med" len="med"/>
-                    </a:lnL>
-                    <a:lnR w="6350" cap="flat" cmpd="sng" algn="ctr">
-                      <a:solidFill>
-                        <a:srgbClr val="D9DEE8"/>
-                      </a:solidFill>
-                      <a:prstDash val="solid"/>
-                      <a:round/>
-                      <a:headEnd type="none" w="med" len="med"/>
-                      <a:tailEnd type="none" w="med" len="med"/>
-                    </a:lnR>
-                    <a:lnT w="6350" cap="flat" cmpd="sng" algn="ctr">
-                      <a:solidFill>
-                        <a:srgbClr val="D9DEE8"/>
-                      </a:solidFill>
-                      <a:prstDash val="solid"/>
-                      <a:round/>
-                      <a:headEnd type="none" w="med" len="med"/>
-                      <a:tailEnd type="none" w="med" len="med"/>
-                    </a:lnT>
-                    <a:lnB w="6350" cap="flat" cmpd="sng" algn="ctr">
-                      <a:solidFill>
-                        <a:srgbClr val="D9DEE8"/>
-                      </a:solidFill>
-                      <a:prstDash val="solid"/>
-                      <a:round/>
-                      <a:headEnd type="none" w="med" len="med"/>
-                      <a:tailEnd type="none" w="med" len="med"/>
-                    </a:lnB>
-                    <a:solidFill>
-                      <a:srgbClr val="F4F6FB"/>
-                    </a:solidFill>
-                  </a:tcPr>
-                </a:tc>
-                <a:tc>
-                  <a:txBody>
-                    <a:bodyPr/>
-                    <a:lstStyle/>
-                    <a:p>
-                      <a:pPr algn="ctr" indent="0" marL="0">
-                        <a:buNone/>
-                      </a:pPr>
-                      <a:r>
-                        <a:rPr lang="en-US" sz="950" b="1" dirty="0">
-                          <a:solidFill>
-                            <a:srgbClr val="3B6FBF"/>
-                          </a:solidFill>
-                          <a:latin typeface="Malgun Gothic" pitchFamily="34" charset="0"/>
-                          <a:ea typeface="Malgun Gothic" pitchFamily="34" charset="-122"/>
-                          <a:cs typeface="Malgun Gothic" pitchFamily="34" charset="-120"/>
-                        </a:rPr>
-                        <a:t>양호</a:t>
-                      </a:r>
-                      <a:endParaRPr lang="en-US" sz="950" dirty="0">
-                        <a:latin typeface="Malgun Gothic" charset="0"/>
-                        <a:ea typeface="Malgun Gothic" charset="0"/>
-                        <a:cs typeface="Malgun Gothic" charset="0"/>
-                      </a:endParaRPr>
-                    </a:p>
-                  </a:txBody>
-                  <a:tcPr marL="73152" marR="73152" marT="18288" marB="18288" anchor="ctr">
-                    <a:lnL w="6350" cap="flat" cmpd="sng" algn="ctr">
-                      <a:solidFill>
-                        <a:srgbClr val="D9DEE8"/>
-                      </a:solidFill>
-                      <a:prstDash val="solid"/>
-                      <a:round/>
-                      <a:headEnd type="none" w="med" len="med"/>
-                      <a:tailEnd type="none" w="med" len="med"/>
-                    </a:lnL>
-                    <a:lnR w="6350" cap="flat" cmpd="sng" algn="ctr">
-                      <a:solidFill>
-                        <a:srgbClr val="D9DEE8"/>
-                      </a:solidFill>
-                      <a:prstDash val="solid"/>
-                      <a:round/>
-                      <a:headEnd type="none" w="med" len="med"/>
-                      <a:tailEnd type="none" w="med" len="med"/>
-                    </a:lnR>
-                    <a:lnT w="6350" cap="flat" cmpd="sng" algn="ctr">
-                      <a:solidFill>
-                        <a:srgbClr val="D9DEE8"/>
-                      </a:solidFill>
-                      <a:prstDash val="solid"/>
-                      <a:round/>
-                      <a:headEnd type="none" w="med" len="med"/>
-                      <a:tailEnd type="none" w="med" len="med"/>
-                    </a:lnT>
-                    <a:lnB w="6350" cap="flat" cmpd="sng" algn="ctr">
-                      <a:solidFill>
-                        <a:srgbClr val="D9DEE8"/>
-                      </a:solidFill>
-                      <a:prstDash val="solid"/>
-                      <a:round/>
-                      <a:headEnd type="none" w="med" len="med"/>
-                      <a:tailEnd type="none" w="med" len="med"/>
-                    </a:lnB>
-                  </a:tcPr>
-                </a:tc>
-                <a:tc>
-                  <a:txBody>
-                    <a:bodyPr/>
-                    <a:lstStyle/>
-                    <a:p>
-                      <a:pPr indent="0" marL="0">
-                        <a:buNone/>
-                      </a:pPr>
-                      <a:r>
-                        <a:rPr lang="en-US" sz="950" dirty="0">
-                          <a:solidFill>
-                            <a:srgbClr val="333333"/>
-                          </a:solidFill>
-                          <a:latin typeface="Malgun Gothic" pitchFamily="34" charset="0"/>
-                          <a:ea typeface="Malgun Gothic" pitchFamily="34" charset="-122"/>
-                          <a:cs typeface="Malgun Gothic" pitchFamily="34" charset="-120"/>
-                        </a:rPr>
-                        <a:t>코너 필지로 토지 활용성 양호</a:t>
-                      </a:r>
-                      <a:endParaRPr lang="en-US" sz="950" dirty="0">
-                        <a:latin typeface="Malgun Gothic" charset="0"/>
-                        <a:ea typeface="Malgun Gothic" charset="0"/>
-                        <a:cs typeface="Malgun Gothic" charset="0"/>
-                      </a:endParaRPr>
-                    </a:p>
-                  </a:txBody>
-                  <a:tcPr marL="73152" marR="73152" marT="18288" marB="18288" anchor="ctr">
-                    <a:lnL w="6350" cap="flat" cmpd="sng" algn="ctr">
-                      <a:solidFill>
-                        <a:srgbClr val="D9DEE8"/>
-                      </a:solidFill>
-                      <a:prstDash val="solid"/>
-                      <a:round/>
-                      <a:headEnd type="none" w="med" len="med"/>
-                      <a:tailEnd type="none" w="med" len="med"/>
-                    </a:lnL>
-                    <a:lnR w="6350" cap="flat" cmpd="sng" algn="ctr">
-                      <a:solidFill>
-                        <a:srgbClr val="D9DEE8"/>
-                      </a:solidFill>
-                      <a:prstDash val="solid"/>
-                      <a:round/>
-                      <a:headEnd type="none" w="med" len="med"/>
-                      <a:tailEnd type="none" w="med" len="med"/>
-                    </a:lnR>
-                    <a:lnT w="6350" cap="flat" cmpd="sng" algn="ctr">
-                      <a:solidFill>
-                        <a:srgbClr val="D9DEE8"/>
-                      </a:solidFill>
-                      <a:prstDash val="solid"/>
-                      <a:round/>
-                      <a:headEnd type="none" w="med" len="med"/>
-                      <a:tailEnd type="none" w="med" len="med"/>
-                    </a:lnT>
-                    <a:lnB w="6350" cap="flat" cmpd="sng" algn="ctr">
-                      <a:solidFill>
-                        <a:srgbClr val="D9DEE8"/>
-                      </a:solidFill>
-                      <a:prstDash val="solid"/>
-                      <a:round/>
-                      <a:headEnd type="none" w="med" len="med"/>
-                      <a:tailEnd type="none" w="med" len="med"/>
-                    </a:lnB>
-                  </a:tcPr>
-                </a:tc>
-              </a:tr>
-              <a:tr h="429768">
-                <a:tc>
-                  <a:txBody>
-                    <a:bodyPr/>
-                    <a:lstStyle/>
-                    <a:p>
-                      <a:pPr indent="0" marL="0">
-                        <a:buNone/>
-                      </a:pPr>
-                      <a:r>
-                        <a:rPr lang="en-US" sz="950" b="1" dirty="0">
-                          <a:solidFill>
-                            <a:srgbClr val="1E2B5C"/>
-                          </a:solidFill>
-                          <a:latin typeface="Malgun Gothic" pitchFamily="34" charset="0"/>
-                          <a:ea typeface="Malgun Gothic" pitchFamily="34" charset="-122"/>
-                          <a:cs typeface="Malgun Gothic" pitchFamily="34" charset="-120"/>
-                        </a:rPr>
-                        <a:t>⑨ 경사도</a:t>
-                      </a:r>
-                      <a:endParaRPr lang="en-US" sz="950" dirty="0">
-                        <a:latin typeface="Malgun Gothic" charset="0"/>
-                        <a:ea typeface="Malgun Gothic" charset="0"/>
-                        <a:cs typeface="Malgun Gothic" charset="0"/>
-                      </a:endParaRPr>
-                    </a:p>
-                  </a:txBody>
-                  <a:tcPr marL="73152" marR="73152" marT="18288" marB="18288" anchor="ctr">
-                    <a:lnL w="6350" cap="flat" cmpd="sng" algn="ctr">
-                      <a:solidFill>
-                        <a:srgbClr val="D9DEE8"/>
-                      </a:solidFill>
-                      <a:prstDash val="solid"/>
-                      <a:round/>
-                      <a:headEnd type="none" w="med" len="med"/>
-                      <a:tailEnd type="none" w="med" len="med"/>
-                    </a:lnL>
-                    <a:lnR w="6350" cap="flat" cmpd="sng" algn="ctr">
-                      <a:solidFill>
-                        <a:srgbClr val="D9DEE8"/>
-                      </a:solidFill>
-                      <a:prstDash val="solid"/>
-                      <a:round/>
-                      <a:headEnd type="none" w="med" len="med"/>
-                      <a:tailEnd type="none" w="med" len="med"/>
-                    </a:lnR>
-                    <a:lnT w="6350" cap="flat" cmpd="sng" algn="ctr">
-                      <a:solidFill>
-                        <a:srgbClr val="D9DEE8"/>
-                      </a:solidFill>
-                      <a:prstDash val="solid"/>
-                      <a:round/>
-                      <a:headEnd type="none" w="med" len="med"/>
-                      <a:tailEnd type="none" w="med" len="med"/>
-                    </a:lnT>
-                    <a:lnB w="6350" cap="flat" cmpd="sng" algn="ctr">
-                      <a:solidFill>
-                        <a:srgbClr val="D9DEE8"/>
-                      </a:solidFill>
-                      <a:prstDash val="solid"/>
-                      <a:round/>
-                      <a:headEnd type="none" w="med" len="med"/>
-                      <a:tailEnd type="none" w="med" len="med"/>
-                    </a:lnB>
-                    <a:solidFill>
-                      <a:srgbClr val="F4F6FB"/>
-                    </a:solidFill>
-                  </a:tcPr>
-                </a:tc>
-                <a:tc>
-                  <a:txBody>
-                    <a:bodyPr/>
-                    <a:lstStyle/>
-                    <a:p>
-                      <a:pPr algn="ctr" indent="0" marL="0">
-                        <a:buNone/>
-                      </a:pPr>
-                      <a:r>
-                        <a:rPr lang="en-US" sz="950" b="1" dirty="0">
-                          <a:solidFill>
-                            <a:srgbClr val="6B7280"/>
-                          </a:solidFill>
-                          <a:latin typeface="Malgun Gothic" pitchFamily="34" charset="0"/>
-                          <a:ea typeface="Malgun Gothic" pitchFamily="34" charset="-122"/>
-                          <a:cs typeface="Malgun Gothic" pitchFamily="34" charset="-120"/>
-                        </a:rPr>
-                        <a:t>보통</a:t>
-                      </a:r>
-                      <a:endParaRPr lang="en-US" sz="950" dirty="0">
-                        <a:latin typeface="Malgun Gothic" charset="0"/>
-                        <a:ea typeface="Malgun Gothic" charset="0"/>
-                        <a:cs typeface="Malgun Gothic" charset="0"/>
-                      </a:endParaRPr>
-                    </a:p>
-                  </a:txBody>
-                  <a:tcPr marL="73152" marR="73152" marT="18288" marB="18288" anchor="ctr">
-                    <a:lnL w="6350" cap="flat" cmpd="sng" algn="ctr">
-                      <a:solidFill>
-                        <a:srgbClr val="D9DEE8"/>
-                      </a:solidFill>
-                      <a:prstDash val="solid"/>
-                      <a:round/>
-                      <a:headEnd type="none" w="med" len="med"/>
-                      <a:tailEnd type="none" w="med" len="med"/>
-                    </a:lnL>
-                    <a:lnR w="6350" cap="flat" cmpd="sng" algn="ctr">
-                      <a:solidFill>
-                        <a:srgbClr val="D9DEE8"/>
-                      </a:solidFill>
-                      <a:prstDash val="solid"/>
-                      <a:round/>
-                      <a:headEnd type="none" w="med" len="med"/>
-                      <a:tailEnd type="none" w="med" len="med"/>
-                    </a:lnR>
-                    <a:lnT w="6350" cap="flat" cmpd="sng" algn="ctr">
-                      <a:solidFill>
-                        <a:srgbClr val="D9DEE8"/>
-                      </a:solidFill>
-                      <a:prstDash val="solid"/>
-                      <a:round/>
-                      <a:headEnd type="none" w="med" len="med"/>
-                      <a:tailEnd type="none" w="med" len="med"/>
-                    </a:lnT>
-                    <a:lnB w="6350" cap="flat" cmpd="sng" algn="ctr">
-                      <a:solidFill>
-                        <a:srgbClr val="D9DEE8"/>
-                      </a:solidFill>
-                      <a:prstDash val="solid"/>
-                      <a:round/>
-                      <a:headEnd type="none" w="med" len="med"/>
-                      <a:tailEnd type="none" w="med" len="med"/>
-                    </a:lnB>
-                  </a:tcPr>
-                </a:tc>
-                <a:tc>
-                  <a:txBody>
-                    <a:bodyPr/>
-                    <a:lstStyle/>
-                    <a:p>
-                      <a:pPr indent="0" marL="0">
-                        <a:buNone/>
-                      </a:pPr>
-                      <a:r>
-                        <a:rPr lang="en-US" sz="950" dirty="0">
-                          <a:solidFill>
-                            <a:srgbClr val="333333"/>
-                          </a:solidFill>
-                          <a:latin typeface="Malgun Gothic" pitchFamily="34" charset="0"/>
-                          <a:ea typeface="Malgun Gothic" pitchFamily="34" charset="-122"/>
-                          <a:cs typeface="Malgun Gothic" pitchFamily="34" charset="-120"/>
-                        </a:rPr>
                         <a:t>진입 및 이용에 큰 제한 없는 일반 수준</a:t>
                       </a:r>
                       <a:endParaRPr lang="en-US" sz="950" dirty="0">
@@ -12136,13 +11888,13 @@
             <a:r>
               <a:rPr lang="en-US" sz="3000" b="1" dirty="0">
                 <a:solidFill>
-                  <a:srgbClr val="1E2B5C"/>
-                </a:solidFill>
-                <a:latin typeface="Malgun Gothic" pitchFamily="34" charset="0"/>
-                <a:ea typeface="Malgun Gothic" pitchFamily="34" charset="-122"/>
-                <a:cs typeface="Malgun Gothic" pitchFamily="34" charset="-120"/>
-              </a:rPr>
-              <a:t>80.4</a:t>
+                  <a:srgbClr val="0F1A2E"/>
+                </a:solidFill>
+                <a:latin typeface="Malgun Gothic" pitchFamily="34" charset="0"/>
+                <a:ea typeface="Malgun Gothic" pitchFamily="34" charset="-122"/>
+                <a:cs typeface="Malgun Gothic" pitchFamily="34" charset="-120"/>
+              </a:rPr>
+              <a:t>82.2</a:t>
             </a:r>
             <a:pPr indent="0" marL="0">
               <a:buNone/>
@@ -12179,7 +11931,7 @@
             </a:avLst>
           </a:prstGeom>
           <a:solidFill>
-            <a:srgbClr val="EE7D22"/>
+            <a:srgbClr val="1E5AF0"/>
           </a:solidFill>
           <a:ln/>
         </p:spPr>
@@ -12311,7 +12063,7 @@
             <a:avLst/>
           </a:prstGeom>
           <a:solidFill>
-            <a:srgbClr val="1E2B5C"/>
+            <a:srgbClr val="0F1A2E"/>
           </a:solidFill>
           <a:ln/>
         </p:spPr>
@@ -12439,7 +12191,7 @@
             <a:r>
               <a:rPr lang="en-US" sz="850" b="1" dirty="0">
                 <a:solidFill>
-                  <a:srgbClr val="EE7D22"/>
+                  <a:srgbClr val="1E5AF0"/>
                 </a:solidFill>
                 <a:latin typeface="Malgun Gothic" pitchFamily="34" charset="0"/>
                 <a:ea typeface="Malgun Gothic" pitchFamily="34" charset="-122"/>
@@ -12503,7 +12255,7 @@
             <a:r>
               <a:rPr lang="en-US" sz="1800" b="1" dirty="0">
                 <a:solidFill>
-                  <a:srgbClr val="1E2B5C"/>
+                  <a:srgbClr val="0F1A2E"/>
                 </a:solidFill>
                 <a:latin typeface="Malgun Gothic" pitchFamily="34" charset="0"/>
                 <a:ea typeface="Malgun Gothic" pitchFamily="34" charset="-122"/>
@@ -12517,7 +12269,7 @@
             <a:r>
               <a:rPr lang="en-US" sz="900" b="1" dirty="0">
                 <a:solidFill>
-                  <a:srgbClr val="EE7D22"/>
+                  <a:srgbClr val="1E5AF0"/>
                 </a:solidFill>
                 <a:latin typeface="Malgun Gothic" pitchFamily="34" charset="0"/>
                 <a:ea typeface="Malgun Gothic" pitchFamily="34" charset="-122"/>
@@ -12584,7 +12336,7 @@
             <a:r>
               <a:rPr lang="en-US" sz="900" b="1" dirty="0">
                 <a:solidFill>
-                  <a:srgbClr val="1E2B5C"/>
+                  <a:srgbClr val="0F1A2E"/>
                 </a:solidFill>
                 <a:latin typeface="Malgun Gothic" pitchFamily="34" charset="0"/>
                 <a:ea typeface="Malgun Gothic" pitchFamily="34" charset="-122"/>
@@ -12627,7 +12379,7 @@
             </a:avLst>
           </a:prstGeom>
           <a:solidFill>
-            <a:srgbClr val="1E2B5C"/>
+            <a:srgbClr val="0F1A2E"/>
           </a:solidFill>
           <a:ln/>
         </p:spPr>
@@ -12702,7 +12454,7 @@
             <a:r>
               <a:rPr lang="en-US" sz="2600" b="1" dirty="0">
                 <a:solidFill>
-                  <a:srgbClr val="1E2B5C"/>
+                  <a:srgbClr val="0F1A2E"/>
                 </a:solidFill>
                 <a:latin typeface="Malgun Gothic" pitchFamily="34" charset="0"/>
                 <a:ea typeface="Malgun Gothic" pitchFamily="34" charset="-122"/>
@@ -12851,7 +12603,7 @@
                       <a:tailEnd type="none" w="med" len="med"/>
                     </a:lnB>
                     <a:solidFill>
-                      <a:srgbClr val="1E2B5C"/>
+                      <a:srgbClr val="0F1A2E"/>
                     </a:solidFill>
                   </a:tcPr>
                 </a:tc>
@@ -12919,7 +12671,7 @@
                       <a:tailEnd type="none" w="med" len="med"/>
                     </a:lnB>
                     <a:solidFill>
-                      <a:srgbClr val="1E2B5C"/>
+                      <a:srgbClr val="0F1A2E"/>
                     </a:solidFill>
                   </a:tcPr>
                 </a:tc>
@@ -12987,7 +12739,7 @@
                       <a:tailEnd type="none" w="med" len="med"/>
                     </a:lnB>
                     <a:solidFill>
-                      <a:srgbClr val="1E2B5C"/>
+                      <a:srgbClr val="0F1A2E"/>
                     </a:solidFill>
                   </a:tcPr>
                 </a:tc>
@@ -13055,7 +12807,7 @@
                       <a:tailEnd type="none" w="med" len="med"/>
                     </a:lnB>
                     <a:solidFill>
-                      <a:srgbClr val="1E2B5C"/>
+                      <a:srgbClr val="0F1A2E"/>
                     </a:solidFill>
                   </a:tcPr>
                 </a:tc>
@@ -13123,7 +12875,7 @@
                       <a:tailEnd type="none" w="med" len="med"/>
                     </a:lnB>
                     <a:solidFill>
-                      <a:srgbClr val="1E2B5C"/>
+                      <a:srgbClr val="0F1A2E"/>
                     </a:solidFill>
                   </a:tcPr>
                 </a:tc>
@@ -13191,7 +12943,7 @@
                       <a:tailEnd type="none" w="med" len="med"/>
                     </a:lnB>
                     <a:solidFill>
-                      <a:srgbClr val="1E2B5C"/>
+                      <a:srgbClr val="0F1A2E"/>
                     </a:solidFill>
                   </a:tcPr>
                 </a:tc>
@@ -13259,7 +13011,7 @@
                       <a:tailEnd type="none" w="med" len="med"/>
                     </a:lnB>
                     <a:solidFill>
-                      <a:srgbClr val="1E2B5C"/>
+                      <a:srgbClr val="0F1A2E"/>
                     </a:solidFill>
                   </a:tcPr>
                 </a:tc>
@@ -13327,7 +13079,7 @@
                       <a:tailEnd type="none" w="med" len="med"/>
                     </a:lnB>
                     <a:solidFill>
-                      <a:srgbClr val="1E2B5C"/>
+                      <a:srgbClr val="0F1A2E"/>
                     </a:solidFill>
                   </a:tcPr>
                 </a:tc>
@@ -13395,7 +13147,7 @@
                       <a:tailEnd type="none" w="med" len="med"/>
                     </a:lnB>
                     <a:solidFill>
-                      <a:srgbClr val="1E2B5C"/>
+                      <a:srgbClr val="0F1A2E"/>
                     </a:solidFill>
                   </a:tcPr>
                 </a:tc>
@@ -13805,7 +13557,7 @@
                       <a:r>
                         <a:rPr lang="en-US" sz="900" b="1" dirty="0">
                           <a:solidFill>
-                            <a:srgbClr val="1E2B5C"/>
+                            <a:srgbClr val="0F1A2E"/>
                           </a:solidFill>
                           <a:latin typeface="Malgun Gothic" pitchFamily="34" charset="0"/>
                           <a:ea typeface="Malgun Gothic" pitchFamily="34" charset="-122"/>
@@ -14395,7 +14147,7 @@
                       <a:r>
                         <a:rPr lang="en-US" sz="900" b="1" dirty="0">
                           <a:solidFill>
-                            <a:srgbClr val="1E2B5C"/>
+                            <a:srgbClr val="0F1A2E"/>
                           </a:solidFill>
                           <a:latin typeface="Malgun Gothic" pitchFamily="34" charset="0"/>
                           <a:ea typeface="Malgun Gothic" pitchFamily="34" charset="-122"/>
@@ -14985,7 +14737,7 @@
                       <a:r>
                         <a:rPr lang="en-US" sz="900" b="1" dirty="0">
                           <a:solidFill>
-                            <a:srgbClr val="1E2B5C"/>
+                            <a:srgbClr val="0F1A2E"/>
                           </a:solidFill>
                           <a:latin typeface="Malgun Gothic" pitchFamily="34" charset="0"/>
                           <a:ea typeface="Malgun Gothic" pitchFamily="34" charset="-122"/>
@@ -15575,7 +15327,7 @@
                       <a:r>
                         <a:rPr lang="en-US" sz="900" b="1" dirty="0">
                           <a:solidFill>
-                            <a:srgbClr val="1E2B5C"/>
+                            <a:srgbClr val="0F1A2E"/>
                           </a:solidFill>
                           <a:latin typeface="Malgun Gothic" pitchFamily="34" charset="0"/>
                           <a:ea typeface="Malgun Gothic" pitchFamily="34" charset="-122"/>
@@ -16165,7 +15917,7 @@
                       <a:r>
                         <a:rPr lang="en-US" sz="900" b="1" dirty="0">
                           <a:solidFill>
-                            <a:srgbClr val="1E2B5C"/>
+                            <a:srgbClr val="0F1A2E"/>
                           </a:solidFill>
                           <a:latin typeface="Malgun Gothic" pitchFamily="34" charset="0"/>
                           <a:ea typeface="Malgun Gothic" pitchFamily="34" charset="-122"/>
@@ -16755,7 +16507,7 @@
                       <a:r>
                         <a:rPr lang="en-US" sz="900" b="1" dirty="0">
                           <a:solidFill>
-                            <a:srgbClr val="1E2B5C"/>
+                            <a:srgbClr val="0F1A2E"/>
                           </a:solidFill>
                           <a:latin typeface="Malgun Gothic" pitchFamily="34" charset="0"/>
                           <a:ea typeface="Malgun Gothic" pitchFamily="34" charset="-122"/>
@@ -17345,7 +17097,7 @@
                       <a:r>
                         <a:rPr lang="en-US" sz="900" b="1" dirty="0">
                           <a:solidFill>
-                            <a:srgbClr val="1E2B5C"/>
+                            <a:srgbClr val="0F1A2E"/>
                           </a:solidFill>
                           <a:latin typeface="Malgun Gothic" pitchFamily="34" charset="0"/>
                           <a:ea typeface="Malgun Gothic" pitchFamily="34" charset="-122"/>
@@ -17577,7 +17329,7 @@
             <a:r>
               <a:rPr lang="en-US" sz="1300" b="1" dirty="0">
                 <a:solidFill>
-                  <a:srgbClr val="1E2B5C"/>
+                  <a:srgbClr val="0F1A2E"/>
                 </a:solidFill>
                 <a:latin typeface="Malgun Gothic" pitchFamily="34" charset="0"/>
                 <a:ea typeface="Malgun Gothic" pitchFamily="34" charset="-122"/>
@@ -17686,7 +17438,7 @@
             <a:r>
               <a:rPr lang="en-US" sz="1150" b="1" dirty="0">
                 <a:solidFill>
-                  <a:srgbClr val="1E2B5C"/>
+                  <a:srgbClr val="0F1A2E"/>
                 </a:solidFill>
                 <a:latin typeface="Malgun Gothic" pitchFamily="34" charset="0"/>
                 <a:ea typeface="Malgun Gothic" pitchFamily="34" charset="-122"/>
@@ -17725,7 +17477,7 @@
             <a:r>
               <a:rPr lang="en-US" sz="1500" b="1" dirty="0">
                 <a:solidFill>
-                  <a:srgbClr val="1E2B5C"/>
+                  <a:srgbClr val="0F1A2E"/>
                 </a:solidFill>
                 <a:latin typeface="Malgun Gothic" pitchFamily="34" charset="0"/>
                 <a:ea typeface="Malgun Gothic" pitchFamily="34" charset="-122"/>
@@ -17834,7 +17586,7 @@
             <a:r>
               <a:rPr lang="en-US" sz="1150" b="1" dirty="0">
                 <a:solidFill>
-                  <a:srgbClr val="1E2B5C"/>
+                  <a:srgbClr val="0F1A2E"/>
                 </a:solidFill>
                 <a:latin typeface="Malgun Gothic" pitchFamily="34" charset="0"/>
                 <a:ea typeface="Malgun Gothic" pitchFamily="34" charset="-122"/>
@@ -17873,7 +17625,7 @@
             <a:r>
               <a:rPr lang="en-US" sz="1500" b="1" dirty="0">
                 <a:solidFill>
-                  <a:srgbClr val="1E2B5C"/>
+                  <a:srgbClr val="0F1A2E"/>
                 </a:solidFill>
                 <a:latin typeface="Malgun Gothic" pitchFamily="34" charset="0"/>
                 <a:ea typeface="Malgun Gothic" pitchFamily="34" charset="-122"/>
@@ -17982,7 +17734,7 @@
             <a:r>
               <a:rPr lang="en-US" sz="1150" b="1" dirty="0">
                 <a:solidFill>
-                  <a:srgbClr val="EE7D22"/>
+                  <a:srgbClr val="1E5AF0"/>
                 </a:solidFill>
                 <a:latin typeface="Malgun Gothic" pitchFamily="34" charset="0"/>
                 <a:ea typeface="Malgun Gothic" pitchFamily="34" charset="-122"/>
@@ -18105,7 +17857,7 @@
             <a:r>
               <a:rPr lang="en-US" sz="1100" b="1" dirty="0">
                 <a:solidFill>
-                  <a:srgbClr val="EE7D22"/>
+                  <a:srgbClr val="1E5AF0"/>
                 </a:solidFill>
                 <a:latin typeface="Malgun Gothic" pitchFamily="34" charset="0"/>
                 <a:ea typeface="Malgun Gothic" pitchFamily="34" charset="-122"/>
@@ -18146,7 +17898,7 @@
             <a:avLst/>
           </a:prstGeom>
           <a:solidFill>
-            <a:srgbClr val="1E2B5C"/>
+            <a:srgbClr val="0F1A2E"/>
           </a:solidFill>
           <a:ln/>
         </p:spPr>
@@ -18274,7 +18026,7 @@
             <a:r>
               <a:rPr lang="en-US" sz="850" b="1" dirty="0">
                 <a:solidFill>
-                  <a:srgbClr val="EE7D22"/>
+                  <a:srgbClr val="1E5AF0"/>
                 </a:solidFill>
                 <a:latin typeface="Malgun Gothic" pitchFamily="34" charset="0"/>
                 <a:ea typeface="Malgun Gothic" pitchFamily="34" charset="-122"/>
@@ -18338,7 +18090,7 @@
             <a:r>
               <a:rPr lang="en-US" sz="1800" b="1" dirty="0">
                 <a:solidFill>
-                  <a:srgbClr val="1E2B5C"/>
+                  <a:srgbClr val="0F1A2E"/>
                 </a:solidFill>
                 <a:latin typeface="Malgun Gothic" pitchFamily="34" charset="0"/>
                 <a:ea typeface="Malgun Gothic" pitchFamily="34" charset="-122"/>
@@ -18352,7 +18104,7 @@
             <a:r>
               <a:rPr lang="en-US" sz="900" b="1" dirty="0">
                 <a:solidFill>
-                  <a:srgbClr val="EE7D22"/>
+                  <a:srgbClr val="1E5AF0"/>
                 </a:solidFill>
                 <a:latin typeface="Malgun Gothic" pitchFamily="34" charset="0"/>
                 <a:ea typeface="Malgun Gothic" pitchFamily="34" charset="-122"/>
@@ -18419,7 +18171,7 @@
             <a:r>
               <a:rPr lang="en-US" sz="900" b="1" dirty="0">
                 <a:solidFill>
-                  <a:srgbClr val="1E2B5C"/>
+                  <a:srgbClr val="0F1A2E"/>
                 </a:solidFill>
                 <a:latin typeface="Malgun Gothic" pitchFamily="34" charset="0"/>
                 <a:ea typeface="Malgun Gothic" pitchFamily="34" charset="-122"/>
@@ -18462,7 +18214,7 @@
             </a:avLst>
           </a:prstGeom>
           <a:solidFill>
-            <a:srgbClr val="1E2B5C"/>
+            <a:srgbClr val="0F1A2E"/>
           </a:solidFill>
           <a:ln/>
         </p:spPr>
@@ -18537,7 +18289,7 @@
             <a:r>
               <a:rPr lang="en-US" sz="2600" b="1" dirty="0">
                 <a:solidFill>
-                  <a:srgbClr val="1E2B5C"/>
+                  <a:srgbClr val="0F1A2E"/>
                 </a:solidFill>
                 <a:latin typeface="Malgun Gothic" pitchFamily="34" charset="0"/>
                 <a:ea typeface="Malgun Gothic" pitchFamily="34" charset="-122"/>
@@ -18685,7 +18437,7 @@
             <a:r>
               <a:rPr lang="en-US" sz="2200" b="1" dirty="0">
                 <a:solidFill>
-                  <a:srgbClr val="1E2B5C"/>
+                  <a:srgbClr val="0F1A2E"/>
                 </a:solidFill>
                 <a:latin typeface="Malgun Gothic" pitchFamily="34" charset="0"/>
                 <a:ea typeface="Malgun Gothic" pitchFamily="34" charset="-122"/>
@@ -18699,7 +18451,7 @@
             <a:r>
               <a:rPr lang="en-US" sz="1100" dirty="0">
                 <a:solidFill>
-                  <a:srgbClr val="1E2B5C"/>
+                  <a:srgbClr val="0F1A2E"/>
                 </a:solidFill>
                 <a:latin typeface="Malgun Gothic" pitchFamily="34" charset="0"/>
                 <a:ea typeface="Malgun Gothic" pitchFamily="34" charset="-122"/>
@@ -18811,7 +18563,7 @@
             <a:r>
               <a:rPr lang="en-US" sz="2200" b="1" dirty="0">
                 <a:solidFill>
-                  <a:srgbClr val="1E2B5C"/>
+                  <a:srgbClr val="0F1A2E"/>
                 </a:solidFill>
                 <a:latin typeface="Malgun Gothic" pitchFamily="34" charset="0"/>
                 <a:ea typeface="Malgun Gothic" pitchFamily="34" charset="-122"/>
@@ -18825,7 +18577,7 @@
             <a:r>
               <a:rPr lang="en-US" sz="1100" dirty="0">
                 <a:solidFill>
-                  <a:srgbClr val="1E2B5C"/>
+                  <a:srgbClr val="0F1A2E"/>
                 </a:solidFill>
                 <a:latin typeface="Malgun Gothic" pitchFamily="34" charset="0"/>
                 <a:ea typeface="Malgun Gothic" pitchFamily="34" charset="-122"/>
@@ -18948,7 +18700,7 @@
             <a:r>
               <a:rPr lang="en-US" sz="2200" b="1" dirty="0">
                 <a:solidFill>
-                  <a:srgbClr val="EE7D22"/>
+                  <a:srgbClr val="1E5AF0"/>
                 </a:solidFill>
                 <a:latin typeface="Malgun Gothic" pitchFamily="34" charset="0"/>
                 <a:ea typeface="Malgun Gothic" pitchFamily="34" charset="-122"/>
@@ -18962,7 +18714,7 @@
             <a:r>
               <a:rPr lang="en-US" sz="1100" dirty="0">
                 <a:solidFill>
-                  <a:srgbClr val="EE7D22"/>
+                  <a:srgbClr val="1E5AF0"/>
                 </a:solidFill>
                 <a:latin typeface="Malgun Gothic" pitchFamily="34" charset="0"/>
                 <a:ea typeface="Malgun Gothic" pitchFamily="34" charset="-122"/>
@@ -19071,7 +18823,7 @@
                       <a:tailEnd type="none" w="med" len="med"/>
                     </a:lnB>
                     <a:solidFill>
-                      <a:srgbClr val="1E2B5C"/>
+                      <a:srgbClr val="0F1A2E"/>
                     </a:solidFill>
                   </a:tcPr>
                 </a:tc>
@@ -19139,7 +18891,7 @@
                       <a:tailEnd type="none" w="med" len="med"/>
                     </a:lnB>
                     <a:solidFill>
-                      <a:srgbClr val="1E2B5C"/>
+                      <a:srgbClr val="0F1A2E"/>
                     </a:solidFill>
                   </a:tcPr>
                 </a:tc>
@@ -19207,7 +18959,7 @@
                       <a:tailEnd type="none" w="med" len="med"/>
                     </a:lnB>
                     <a:solidFill>
-                      <a:srgbClr val="1E2B5C"/>
+                      <a:srgbClr val="0F1A2E"/>
                     </a:solidFill>
                   </a:tcPr>
                 </a:tc>
@@ -19275,7 +19027,7 @@
                       <a:tailEnd type="none" w="med" len="med"/>
                     </a:lnB>
                     <a:solidFill>
-                      <a:srgbClr val="1E2B5C"/>
+                      <a:srgbClr val="0F1A2E"/>
                     </a:solidFill>
                   </a:tcPr>
                 </a:tc>
@@ -19343,7 +19095,7 @@
                       <a:tailEnd type="none" w="med" len="med"/>
                     </a:lnB>
                     <a:solidFill>
-                      <a:srgbClr val="1E2B5C"/>
+                      <a:srgbClr val="0F1A2E"/>
                     </a:solidFill>
                   </a:tcPr>
                 </a:tc>
@@ -19558,7 +19310,7 @@
                       <a:r>
                         <a:rPr lang="en-US" sz="950" b="1" dirty="0">
                           <a:solidFill>
-                            <a:srgbClr val="EE7D22"/>
+                            <a:srgbClr val="1E5AF0"/>
                           </a:solidFill>
                           <a:latin typeface="Malgun Gothic" pitchFamily="34" charset="0"/>
                           <a:ea typeface="Malgun Gothic" pitchFamily="34" charset="-122"/>
@@ -19888,7 +19640,7 @@
                       <a:r>
                         <a:rPr lang="en-US" sz="950" b="1" dirty="0">
                           <a:solidFill>
-                            <a:srgbClr val="EE7D22"/>
+                            <a:srgbClr val="1E5AF0"/>
                           </a:solidFill>
                           <a:latin typeface="Malgun Gothic" pitchFamily="34" charset="0"/>
                           <a:ea typeface="Malgun Gothic" pitchFamily="34" charset="-122"/>
@@ -20218,7 +19970,7 @@
                       <a:r>
                         <a:rPr lang="en-US" sz="950" b="1" dirty="0">
                           <a:solidFill>
-                            <a:srgbClr val="EE7D22"/>
+                            <a:srgbClr val="1E5AF0"/>
                           </a:solidFill>
                           <a:latin typeface="Malgun Gothic" pitchFamily="34" charset="0"/>
                           <a:ea typeface="Malgun Gothic" pitchFamily="34" charset="-122"/>
@@ -20548,7 +20300,7 @@
                       <a:r>
                         <a:rPr lang="en-US" sz="950" b="1" dirty="0">
                           <a:solidFill>
-                            <a:srgbClr val="EE7D22"/>
+                            <a:srgbClr val="1E5AF0"/>
                           </a:solidFill>
                           <a:latin typeface="Malgun Gothic" pitchFamily="34" charset="0"/>
                           <a:ea typeface="Malgun Gothic" pitchFamily="34" charset="-122"/>
@@ -20878,7 +20630,7 @@
                       <a:r>
                         <a:rPr lang="en-US" sz="950" b="1" dirty="0">
                           <a:solidFill>
-                            <a:srgbClr val="EE7D22"/>
+                            <a:srgbClr val="1E5AF0"/>
                           </a:solidFill>
                           <a:latin typeface="Malgun Gothic" pitchFamily="34" charset="0"/>
                           <a:ea typeface="Malgun Gothic" pitchFamily="34" charset="-122"/>
@@ -21208,7 +20960,7 @@
                       <a:r>
                         <a:rPr lang="en-US" sz="950" b="1" dirty="0">
                           <a:solidFill>
-                            <a:srgbClr val="EE7D22"/>
+                            <a:srgbClr val="1E5AF0"/>
                           </a:solidFill>
                           <a:latin typeface="Malgun Gothic" pitchFamily="34" charset="0"/>
                           <a:ea typeface="Malgun Gothic" pitchFamily="34" charset="-122"/>
@@ -21340,7 +21092,7 @@
                       <a:r>
                         <a:rPr lang="en-US" sz="950" b="1" dirty="0">
                           <a:solidFill>
-                            <a:srgbClr val="1E2B5C"/>
+                            <a:srgbClr val="0F1A2E"/>
                           </a:solidFill>
                           <a:latin typeface="Malgun Gothic" pitchFamily="34" charset="0"/>
                           <a:ea typeface="Malgun Gothic" pitchFamily="34" charset="-122"/>
@@ -21408,7 +21160,7 @@
                       <a:r>
                         <a:rPr lang="en-US" sz="950" b="1" dirty="0">
                           <a:solidFill>
-                            <a:srgbClr val="1E2B5C"/>
+                            <a:srgbClr val="0F1A2E"/>
                           </a:solidFill>
                           <a:latin typeface="Malgun Gothic" pitchFamily="34" charset="0"/>
                           <a:ea typeface="Malgun Gothic" pitchFamily="34" charset="-122"/>
@@ -21476,7 +21228,7 @@
                       <a:r>
                         <a:rPr lang="en-US" sz="950" b="1" dirty="0">
                           <a:solidFill>
-                            <a:srgbClr val="1E2B5C"/>
+                            <a:srgbClr val="0F1A2E"/>
                           </a:solidFill>
                           <a:latin typeface="Malgun Gothic" pitchFamily="34" charset="0"/>
                           <a:ea typeface="Malgun Gothic" pitchFamily="34" charset="-122"/>
@@ -21544,7 +21296,7 @@
                       <a:r>
                         <a:rPr lang="en-US" sz="950" b="1" dirty="0">
                           <a:solidFill>
-                            <a:srgbClr val="EE7D22"/>
+                            <a:srgbClr val="1E5AF0"/>
                           </a:solidFill>
                           <a:latin typeface="Malgun Gothic" pitchFamily="34" charset="0"/>
                           <a:ea typeface="Malgun Gothic" pitchFamily="34" charset="-122"/>
@@ -21612,7 +21364,7 @@
                       <a:r>
                         <a:rPr lang="en-US" sz="950" b="1" dirty="0">
                           <a:solidFill>
-                            <a:srgbClr val="1E2B5C"/>
+                            <a:srgbClr val="0F1A2E"/>
                           </a:solidFill>
                           <a:latin typeface="Malgun Gothic" pitchFamily="34" charset="0"/>
                           <a:ea typeface="Malgun Gothic" pitchFamily="34" charset="-122"/>
@@ -21705,7 +21457,7 @@
             <a:avLst/>
           </a:prstGeom>
           <a:solidFill>
-            <a:srgbClr val="1E2B5C"/>
+            <a:srgbClr val="0F1A2E"/>
           </a:solidFill>
           <a:ln/>
         </p:spPr>
@@ -21833,7 +21585,7 @@
             <a:r>
               <a:rPr lang="en-US" sz="850" b="1" dirty="0">
                 <a:solidFill>
-                  <a:srgbClr val="EE7D22"/>
+                  <a:srgbClr val="1E5AF0"/>
                 </a:solidFill>
                 <a:latin typeface="Malgun Gothic" pitchFamily="34" charset="0"/>
                 <a:ea typeface="Malgun Gothic" pitchFamily="34" charset="-122"/>
@@ -21897,7 +21649,7 @@
             <a:r>
               <a:rPr lang="en-US" sz="1800" b="1" dirty="0">
                 <a:solidFill>
-                  <a:srgbClr val="1E2B5C"/>
+                  <a:srgbClr val="0F1A2E"/>
                 </a:solidFill>
                 <a:latin typeface="Malgun Gothic" pitchFamily="34" charset="0"/>
                 <a:ea typeface="Malgun Gothic" pitchFamily="34" charset="-122"/>
@@ -21911,7 +21663,7 @@
             <a:r>
               <a:rPr lang="en-US" sz="900" b="1" dirty="0">
                 <a:solidFill>
-                  <a:srgbClr val="EE7D22"/>
+                  <a:srgbClr val="1E5AF0"/>
                 </a:solidFill>
                 <a:latin typeface="Malgun Gothic" pitchFamily="34" charset="0"/>
                 <a:ea typeface="Malgun Gothic" pitchFamily="34" charset="-122"/>
@@ -21978,7 +21730,7 @@
             <a:r>
               <a:rPr lang="en-US" sz="900" b="1" dirty="0">
                 <a:solidFill>
-                  <a:srgbClr val="1E2B5C"/>
+                  <a:srgbClr val="0F1A2E"/>
                 </a:solidFill>
                 <a:latin typeface="Malgun Gothic" pitchFamily="34" charset="0"/>
                 <a:ea typeface="Malgun Gothic" pitchFamily="34" charset="-122"/>
@@ -22021,7 +21773,7 @@
             </a:avLst>
           </a:prstGeom>
           <a:solidFill>
-            <a:srgbClr val="1E2B5C"/>
+            <a:srgbClr val="0F1A2E"/>
           </a:solidFill>
           <a:ln/>
         </p:spPr>
@@ -22096,7 +21848,7 @@
             <a:r>
               <a:rPr lang="en-US" sz="2600" b="1" dirty="0">
                 <a:solidFill>
-                  <a:srgbClr val="1E2B5C"/>
+                  <a:srgbClr val="0F1A2E"/>
                 </a:solidFill>
                 <a:latin typeface="Malgun Gothic" pitchFamily="34" charset="0"/>
                 <a:ea typeface="Malgun Gothic" pitchFamily="34" charset="-122"/>
@@ -22244,7 +21996,7 @@
             <a:r>
               <a:rPr lang="en-US" sz="2000" b="1" dirty="0">
                 <a:solidFill>
-                  <a:srgbClr val="1E2B5C"/>
+                  <a:srgbClr val="0F1A2E"/>
                 </a:solidFill>
                 <a:latin typeface="Malgun Gothic" pitchFamily="34" charset="0"/>
                 <a:ea typeface="Malgun Gothic" pitchFamily="34" charset="-122"/>
@@ -22258,7 +22010,7 @@
             <a:r>
               <a:rPr lang="en-US" sz="1000" dirty="0">
                 <a:solidFill>
-                  <a:srgbClr val="1E2B5C"/>
+                  <a:srgbClr val="0F1A2E"/>
                 </a:solidFill>
                 <a:latin typeface="Malgun Gothic" pitchFamily="34" charset="0"/>
                 <a:ea typeface="Malgun Gothic" pitchFamily="34" charset="-122"/>
@@ -22367,7 +22119,7 @@
             <a:r>
               <a:rPr lang="en-US" sz="2000" b="1" dirty="0">
                 <a:solidFill>
-                  <a:srgbClr val="1E2B5C"/>
+                  <a:srgbClr val="0F1A2E"/>
                 </a:solidFill>
                 <a:latin typeface="Malgun Gothic" pitchFamily="34" charset="0"/>
                 <a:ea typeface="Malgun Gothic" pitchFamily="34" charset="-122"/>
@@ -22381,7 +22133,7 @@
             <a:r>
               <a:rPr lang="en-US" sz="1000" dirty="0">
                 <a:solidFill>
-                  <a:srgbClr val="1E2B5C"/>
+                  <a:srgbClr val="0F1A2E"/>
                 </a:solidFill>
                 <a:latin typeface="Malgun Gothic" pitchFamily="34" charset="0"/>
                 <a:ea typeface="Malgun Gothic" pitchFamily="34" charset="-122"/>
@@ -22490,7 +22242,7 @@
             <a:r>
               <a:rPr lang="en-US" sz="2000" b="1" dirty="0">
                 <a:solidFill>
-                  <a:srgbClr val="1E2B5C"/>
+                  <a:srgbClr val="0F1A2E"/>
                 </a:solidFill>
                 <a:latin typeface="Malgun Gothic" pitchFamily="34" charset="0"/>
                 <a:ea typeface="Malgun Gothic" pitchFamily="34" charset="-122"/>
@@ -22504,7 +22256,7 @@
             <a:r>
               <a:rPr lang="en-US" sz="1000" dirty="0">
                 <a:solidFill>
-                  <a:srgbClr val="1E2B5C"/>
+                  <a:srgbClr val="0F1A2E"/>
                 </a:solidFill>
                 <a:latin typeface="Malgun Gothic" pitchFamily="34" charset="0"/>
                 <a:ea typeface="Malgun Gothic" pitchFamily="34" charset="-122"/>
@@ -22613,7 +22365,7 @@
             <a:r>
               <a:rPr lang="en-US" sz="2000" b="1" dirty="0">
                 <a:solidFill>
-                  <a:srgbClr val="EE7D22"/>
+                  <a:srgbClr val="1E5AF0"/>
                 </a:solidFill>
                 <a:latin typeface="Malgun Gothic" pitchFamily="34" charset="0"/>
                 <a:ea typeface="Malgun Gothic" pitchFamily="34" charset="-122"/>
@@ -22627,7 +22379,7 @@
             <a:r>
               <a:rPr lang="en-US" sz="1000" dirty="0">
                 <a:solidFill>
-                  <a:srgbClr val="EE7D22"/>
+                  <a:srgbClr val="1E5AF0"/>
                 </a:solidFill>
                 <a:latin typeface="Malgun Gothic" pitchFamily="34" charset="0"/>
                 <a:ea typeface="Malgun Gothic" pitchFamily="34" charset="-122"/>
@@ -22666,7 +22418,7 @@
             <a:r>
               <a:rPr lang="en-US" sz="1300" b="1" dirty="0">
                 <a:solidFill>
-                  <a:srgbClr val="1E2B5C"/>
+                  <a:srgbClr val="0F1A2E"/>
                 </a:solidFill>
                 <a:latin typeface="Malgun Gothic" pitchFamily="34" charset="0"/>
                 <a:ea typeface="Malgun Gothic" pitchFamily="34" charset="-122"/>
@@ -22770,7 +22522,7 @@
                       <a:tailEnd type="none" w="med" len="med"/>
                     </a:lnB>
                     <a:solidFill>
-                      <a:srgbClr val="1E2B5C"/>
+                      <a:srgbClr val="0F1A2E"/>
                     </a:solidFill>
                   </a:tcPr>
                 </a:tc>
@@ -22838,7 +22590,7 @@
                       <a:tailEnd type="none" w="med" len="med"/>
                     </a:lnB>
                     <a:solidFill>
-                      <a:srgbClr val="1E2B5C"/>
+                      <a:srgbClr val="0F1A2E"/>
                     </a:solidFill>
                   </a:tcPr>
                 </a:tc>
@@ -22906,7 +22658,7 @@
                       <a:tailEnd type="none" w="med" len="med"/>
                     </a:lnB>
                     <a:solidFill>
-                      <a:srgbClr val="EE7D22"/>
+                      <a:srgbClr val="1E5AF0"/>
                     </a:solidFill>
                   </a:tcPr>
                 </a:tc>
@@ -22923,7 +22675,7 @@
                       <a:r>
                         <a:rPr lang="en-US" sz="1000" b="1" dirty="0">
                           <a:solidFill>
-                            <a:srgbClr val="1E2B5C"/>
+                            <a:srgbClr val="0F1A2E"/>
                           </a:solidFill>
                           <a:latin typeface="Malgun Gothic" pitchFamily="34" charset="0"/>
                           <a:ea typeface="Malgun Gothic" pitchFamily="34" charset="-122"/>
@@ -23056,7 +22808,7 @@
                       <a:r>
                         <a:rPr lang="en-US" sz="1300" b="1" dirty="0">
                           <a:solidFill>
-                            <a:srgbClr val="EE7D22"/>
+                            <a:srgbClr val="1E5AF0"/>
                           </a:solidFill>
                           <a:latin typeface="Malgun Gothic" pitchFamily="34" charset="0"/>
                           <a:ea typeface="Malgun Gothic" pitchFamily="34" charset="-122"/>
@@ -23126,7 +22878,7 @@
                       <a:r>
                         <a:rPr lang="en-US" sz="1000" b="1" dirty="0">
                           <a:solidFill>
-                            <a:srgbClr val="1E2B5C"/>
+                            <a:srgbClr val="0F1A2E"/>
                           </a:solidFill>
                           <a:latin typeface="Malgun Gothic" pitchFamily="34" charset="0"/>
                           <a:ea typeface="Malgun Gothic" pitchFamily="34" charset="-122"/>
@@ -23259,7 +23011,7 @@
                       <a:r>
                         <a:rPr lang="en-US" sz="1300" b="1" dirty="0">
                           <a:solidFill>
-                            <a:srgbClr val="EE7D22"/>
+                            <a:srgbClr val="1E5AF0"/>
                           </a:solidFill>
                           <a:latin typeface="Malgun Gothic" pitchFamily="34" charset="0"/>
                           <a:ea typeface="Malgun Gothic" pitchFamily="34" charset="-122"/>
@@ -23348,7 +23100,7 @@
             <a:r>
               <a:rPr lang="en-US" sz="1100" b="1" dirty="0">
                 <a:solidFill>
-                  <a:srgbClr val="EE7D22"/>
+                  <a:srgbClr val="1E5AF0"/>
                 </a:solidFill>
                 <a:latin typeface="Malgun Gothic" pitchFamily="34" charset="0"/>
                 <a:ea typeface="Malgun Gothic" pitchFamily="34" charset="-122"/>
@@ -23387,7 +23139,7 @@
             <a:r>
               <a:rPr lang="en-US" sz="1300" b="1" dirty="0">
                 <a:solidFill>
-                  <a:srgbClr val="1E2B5C"/>
+                  <a:srgbClr val="0F1A2E"/>
                 </a:solidFill>
                 <a:latin typeface="Malgun Gothic" pitchFamily="34" charset="0"/>
                 <a:ea typeface="Malgun Gothic" pitchFamily="34" charset="-122"/>
@@ -23496,7 +23248,7 @@
             <a:r>
               <a:rPr lang="en-US" sz="950" b="1" dirty="0">
                 <a:solidFill>
-                  <a:srgbClr val="1E2B5C"/>
+                  <a:srgbClr val="0F1A2E"/>
                 </a:solidFill>
                 <a:latin typeface="Malgun Gothic" pitchFamily="34" charset="0"/>
                 <a:ea typeface="Malgun Gothic" pitchFamily="34" charset="-122"/>
@@ -23535,7 +23287,7 @@
             <a:r>
               <a:rPr lang="en-US" sz="1300" b="1" dirty="0">
                 <a:solidFill>
-                  <a:srgbClr val="1E2B5C"/>
+                  <a:srgbClr val="0F1A2E"/>
                 </a:solidFill>
                 <a:latin typeface="Malgun Gothic" pitchFamily="34" charset="0"/>
                 <a:ea typeface="Malgun Gothic" pitchFamily="34" charset="-122"/>
@@ -23644,7 +23396,7 @@
             <a:r>
               <a:rPr lang="en-US" sz="950" b="1" dirty="0">
                 <a:solidFill>
-                  <a:srgbClr val="1E2B5C"/>
+                  <a:srgbClr val="0F1A2E"/>
                 </a:solidFill>
                 <a:latin typeface="Malgun Gothic" pitchFamily="34" charset="0"/>
                 <a:ea typeface="Malgun Gothic" pitchFamily="34" charset="-122"/>
@@ -23683,7 +23435,7 @@
             <a:r>
               <a:rPr lang="en-US" sz="1300" b="1" dirty="0">
                 <a:solidFill>
-                  <a:srgbClr val="1E2B5C"/>
+                  <a:srgbClr val="0F1A2E"/>
                 </a:solidFill>
                 <a:latin typeface="Malgun Gothic" pitchFamily="34" charset="0"/>
                 <a:ea typeface="Malgun Gothic" pitchFamily="34" charset="-122"/>
@@ -23792,7 +23544,7 @@
             <a:r>
               <a:rPr lang="en-US" sz="950" b="1" dirty="0">
                 <a:solidFill>
-                  <a:srgbClr val="1E2B5C"/>
+                  <a:srgbClr val="0F1A2E"/>
                 </a:solidFill>
                 <a:latin typeface="Malgun Gothic" pitchFamily="34" charset="0"/>
                 <a:ea typeface="Malgun Gothic" pitchFamily="34" charset="-122"/>
@@ -23831,7 +23583,7 @@
             <a:r>
               <a:rPr lang="en-US" sz="1300" b="1" dirty="0">
                 <a:solidFill>
-                  <a:srgbClr val="1E2B5C"/>
+                  <a:srgbClr val="0F1A2E"/>
                 </a:solidFill>
                 <a:latin typeface="Malgun Gothic" pitchFamily="34" charset="0"/>
                 <a:ea typeface="Malgun Gothic" pitchFamily="34" charset="-122"/>
@@ -23940,7 +23692,7 @@
             <a:r>
               <a:rPr lang="en-US" sz="950" b="1" dirty="0">
                 <a:solidFill>
-                  <a:srgbClr val="1E2B5C"/>
+                  <a:srgbClr val="0F1A2E"/>
                 </a:solidFill>
                 <a:latin typeface="Malgun Gothic" pitchFamily="34" charset="0"/>
                 <a:ea typeface="Malgun Gothic" pitchFamily="34" charset="-122"/>
@@ -23979,7 +23731,7 @@
             <a:r>
               <a:rPr lang="en-US" sz="1300" b="1" dirty="0">
                 <a:solidFill>
-                  <a:srgbClr val="1E2B5C"/>
+                  <a:srgbClr val="0F1A2E"/>
                 </a:solidFill>
                 <a:latin typeface="Malgun Gothic" pitchFamily="34" charset="0"/>
                 <a:ea typeface="Malgun Gothic" pitchFamily="34" charset="-122"/>
@@ -24088,7 +23840,7 @@
             <a:r>
               <a:rPr lang="en-US" sz="950" b="1" dirty="0">
                 <a:solidFill>
-                  <a:srgbClr val="EE7D22"/>
+                  <a:srgbClr val="1E5AF0"/>
                 </a:solidFill>
                 <a:latin typeface="Malgun Gothic" pitchFamily="34" charset="0"/>
                 <a:ea typeface="Malgun Gothic" pitchFamily="34" charset="-122"/>
@@ -24117,7 +23869,7 @@
             </a:avLst>
           </a:prstGeom>
           <a:solidFill>
-            <a:srgbClr val="1E2B5C"/>
+            <a:srgbClr val="0F1A2E"/>
           </a:solidFill>
           <a:ln/>
         </p:spPr>
@@ -24298,7 +24050,7 @@
             <a:r>
               <a:rPr lang="en-US" sz="1200" b="1" dirty="0">
                 <a:solidFill>
-                  <a:srgbClr val="1E2B5C"/>
+                  <a:srgbClr val="0F1A2E"/>
                 </a:solidFill>
                 <a:latin typeface="Malgun Gothic" pitchFamily="34" charset="0"/>
                 <a:ea typeface="Malgun Gothic" pitchFamily="34" charset="-122"/>
@@ -24367,7 +24119,7 @@
             <a:avLst/>
           </a:prstGeom>
           <a:solidFill>
-            <a:srgbClr val="1E2B5C"/>
+            <a:srgbClr val="0F1A2E"/>
           </a:solidFill>
           <a:ln/>
         </p:spPr>
@@ -24495,7 +24247,7 @@
             <a:r>
               <a:rPr lang="en-US" sz="850" b="1" dirty="0">
                 <a:solidFill>
-                  <a:srgbClr val="EE7D22"/>
+                  <a:srgbClr val="1E5AF0"/>
                 </a:solidFill>
                 <a:latin typeface="Malgun Gothic" pitchFamily="34" charset="0"/>
                 <a:ea typeface="Malgun Gothic" pitchFamily="34" charset="-122"/>
@@ -24559,7 +24311,7 @@
             <a:r>
               <a:rPr lang="en-US" sz="1800" b="1" dirty="0">
                 <a:solidFill>
-                  <a:srgbClr val="1E2B5C"/>
+                  <a:srgbClr val="0F1A2E"/>
                 </a:solidFill>
                 <a:latin typeface="Malgun Gothic" pitchFamily="34" charset="0"/>
                 <a:ea typeface="Malgun Gothic" pitchFamily="34" charset="-122"/>
@@ -24573,7 +24325,7 @@
             <a:r>
               <a:rPr lang="en-US" sz="900" b="1" dirty="0">
                 <a:solidFill>
-                  <a:srgbClr val="EE7D22"/>
+                  <a:srgbClr val="1E5AF0"/>
                 </a:solidFill>
                 <a:latin typeface="Malgun Gothic" pitchFamily="34" charset="0"/>
                 <a:ea typeface="Malgun Gothic" pitchFamily="34" charset="-122"/>
@@ -24640,7 +24392,7 @@
             <a:r>
               <a:rPr lang="en-US" sz="900" b="1" dirty="0">
                 <a:solidFill>
-                  <a:srgbClr val="1E2B5C"/>
+                  <a:srgbClr val="0F1A2E"/>
                 </a:solidFill>
                 <a:latin typeface="Malgun Gothic" pitchFamily="34" charset="0"/>
                 <a:ea typeface="Malgun Gothic" pitchFamily="34" charset="-122"/>
@@ -24683,7 +24435,7 @@
             </a:avLst>
           </a:prstGeom>
           <a:solidFill>
-            <a:srgbClr val="1E2B5C"/>
+            <a:srgbClr val="0F1A2E"/>
           </a:solidFill>
           <a:ln/>
         </p:spPr>
@@ -24758,7 +24510,7 @@
             <a:r>
               <a:rPr lang="en-US" sz="2600" b="1" dirty="0">
                 <a:solidFill>
-                  <a:srgbClr val="1E2B5C"/>
+                  <a:srgbClr val="0F1A2E"/>
                 </a:solidFill>
                 <a:latin typeface="Malgun Gothic" pitchFamily="34" charset="0"/>
                 <a:ea typeface="Malgun Gothic" pitchFamily="34" charset="-122"/>
@@ -24867,7 +24619,7 @@
             <a:r>
               <a:rPr lang="en-US" sz="1100" b="1" dirty="0">
                 <a:solidFill>
-                  <a:srgbClr val="1E2B5C"/>
+                  <a:srgbClr val="0F1A2E"/>
                 </a:solidFill>
                 <a:latin typeface="Malgun Gothic" pitchFamily="34" charset="0"/>
                 <a:ea typeface="Malgun Gothic" pitchFamily="34" charset="-122"/>
@@ -24945,7 +24697,7 @@
             <a:r>
               <a:rPr lang="en-US" sz="2400" b="1" dirty="0">
                 <a:solidFill>
-                  <a:srgbClr val="1E2B5C"/>
+                  <a:srgbClr val="0F1A2E"/>
                 </a:solidFill>
                 <a:latin typeface="Malgun Gothic" pitchFamily="34" charset="0"/>
                 <a:ea typeface="Malgun Gothic" pitchFamily="34" charset="-122"/>
@@ -24959,7 +24711,7 @@
             <a:r>
               <a:rPr lang="en-US" sz="1100" dirty="0">
                 <a:solidFill>
-                  <a:srgbClr val="1E2B5C"/>
+                  <a:srgbClr val="0F1A2E"/>
                 </a:solidFill>
                 <a:latin typeface="Malgun Gothic" pitchFamily="34" charset="0"/>
                 <a:ea typeface="Malgun Gothic" pitchFamily="34" charset="-122"/>
@@ -25071,7 +24823,7 @@
             <a:r>
               <a:rPr lang="en-US" sz="1100" b="1" dirty="0">
                 <a:solidFill>
-                  <a:srgbClr val="1E2B5C"/>
+                  <a:srgbClr val="0F1A2E"/>
                 </a:solidFill>
                 <a:latin typeface="Malgun Gothic" pitchFamily="34" charset="0"/>
                 <a:ea typeface="Malgun Gothic" pitchFamily="34" charset="-122"/>
@@ -25275,7 +25027,7 @@
             <a:r>
               <a:rPr lang="en-US" sz="1100" b="1" dirty="0">
                 <a:solidFill>
-                  <a:srgbClr val="1E2B5C"/>
+                  <a:srgbClr val="0F1A2E"/>
                 </a:solidFill>
                 <a:latin typeface="Malgun Gothic" pitchFamily="34" charset="0"/>
                 <a:ea typeface="Malgun Gothic" pitchFamily="34" charset="-122"/>
@@ -25353,7 +25105,7 @@
             <a:r>
               <a:rPr lang="en-US" sz="2400" b="1" dirty="0">
                 <a:solidFill>
-                  <a:srgbClr val="EE7D22"/>
+                  <a:srgbClr val="1E5AF0"/>
                 </a:solidFill>
                 <a:latin typeface="Malgun Gothic" pitchFamily="34" charset="0"/>
                 <a:ea typeface="Malgun Gothic" pitchFamily="34" charset="-122"/>
@@ -25367,7 +25119,7 @@
             <a:r>
               <a:rPr lang="en-US" sz="1100" dirty="0">
                 <a:solidFill>
-                  <a:srgbClr val="EE7D22"/>
+                  <a:srgbClr val="1E5AF0"/>
                 </a:solidFill>
                 <a:latin typeface="Malgun Gothic" pitchFamily="34" charset="0"/>
                 <a:ea typeface="Malgun Gothic" pitchFamily="34" charset="-122"/>
@@ -25381,7 +25133,7 @@
             <a:r>
               <a:rPr lang="en-US" sz="900" b="1" dirty="0">
                 <a:solidFill>
-                  <a:srgbClr val="EE7D22"/>
+                  <a:srgbClr val="1E5AF0"/>
                 </a:solidFill>
                 <a:latin typeface="Malgun Gothic" pitchFamily="34" charset="0"/>
                 <a:ea typeface="Malgun Gothic" pitchFamily="34" charset="-122"/>
@@ -25451,7 +25203,7 @@
             <a:r>
               <a:rPr lang="en-US" sz="1250" b="1" dirty="0">
                 <a:solidFill>
-                  <a:srgbClr val="1E2B5C"/>
+                  <a:srgbClr val="0F1A2E"/>
                 </a:solidFill>
                 <a:latin typeface="Malgun Gothic" pitchFamily="34" charset="0"/>
                 <a:ea typeface="Malgun Gothic" pitchFamily="34" charset="-122"/>
@@ -25627,7 +25379,7 @@
             <a:r>
               <a:rPr lang="en-US" sz="1250" b="1" dirty="0">
                 <a:solidFill>
-                  <a:srgbClr val="EE7D22"/>
+                  <a:srgbClr val="1E5AF0"/>
                 </a:solidFill>
                 <a:latin typeface="Malgun Gothic" pitchFamily="34" charset="0"/>
                 <a:ea typeface="Malgun Gothic" pitchFamily="34" charset="-122"/>
@@ -25772,7 +25524,7 @@
             <a:r>
               <a:rPr lang="en-US" sz="1300" b="1" dirty="0">
                 <a:solidFill>
-                  <a:srgbClr val="1E2B5C"/>
+                  <a:srgbClr val="0F1A2E"/>
                 </a:solidFill>
                 <a:latin typeface="Malgun Gothic" pitchFamily="34" charset="0"/>
                 <a:ea typeface="Malgun Gothic" pitchFamily="34" charset="-122"/>
@@ -25881,7 +25633,7 @@
             <a:r>
               <a:rPr lang="en-US" sz="1400" b="1" dirty="0">
                 <a:solidFill>
-                  <a:srgbClr val="1E2B5C"/>
+                  <a:srgbClr val="0F1A2E"/>
                 </a:solidFill>
                 <a:latin typeface="Malgun Gothic" pitchFamily="34" charset="0"/>
                 <a:ea typeface="Malgun Gothic" pitchFamily="34" charset="-122"/>
@@ -25990,7 +25742,7 @@
             <a:r>
               <a:rPr lang="en-US" sz="1400" b="1" dirty="0">
                 <a:solidFill>
-                  <a:srgbClr val="1E2B5C"/>
+                  <a:srgbClr val="0F1A2E"/>
                 </a:solidFill>
                 <a:latin typeface="Malgun Gothic" pitchFamily="34" charset="0"/>
                 <a:ea typeface="Malgun Gothic" pitchFamily="34" charset="-122"/>
@@ -26099,7 +25851,7 @@
             <a:r>
               <a:rPr lang="en-US" sz="1400" b="1" dirty="0">
                 <a:solidFill>
-                  <a:srgbClr val="1E2B5C"/>
+                  <a:srgbClr val="0F1A2E"/>
                 </a:solidFill>
                 <a:latin typeface="Malgun Gothic" pitchFamily="34" charset="0"/>
                 <a:ea typeface="Malgun Gothic" pitchFamily="34" charset="-122"/>
@@ -26208,7 +25960,7 @@
             <a:r>
               <a:rPr lang="en-US" sz="1400" b="1" dirty="0">
                 <a:solidFill>
-                  <a:srgbClr val="EE7D22"/>
+                  <a:srgbClr val="1E5AF0"/>
                 </a:solidFill>
                 <a:latin typeface="Malgun Gothic" pitchFamily="34" charset="0"/>
                 <a:ea typeface="Malgun Gothic" pitchFamily="34" charset="-122"/>
@@ -26235,7 +25987,7 @@
             <a:avLst/>
           </a:prstGeom>
           <a:solidFill>
-            <a:srgbClr val="1E2B5C"/>
+            <a:srgbClr val="0F1A2E"/>
           </a:solidFill>
           <a:ln/>
         </p:spPr>
@@ -26363,7 +26115,7 @@
             <a:r>
               <a:rPr lang="en-US" sz="850" b="1" dirty="0">
                 <a:solidFill>
-                  <a:srgbClr val="EE7D22"/>
+                  <a:srgbClr val="1E5AF0"/>
                 </a:solidFill>
                 <a:latin typeface="Malgun Gothic" pitchFamily="34" charset="0"/>
                 <a:ea typeface="Malgun Gothic" pitchFamily="34" charset="-122"/>

--- a/specs/03-features/R_example.pptx
+++ b/specs/03-features/R_example.pptx
@@ -172,9 +172,9 @@
           </c:marker>
           <c:cat>
             <c:strRef>
-              <c:f>Sheet1!$A$2:$A$9</c:f>
+              <c:f>Sheet1!$A$2:$A$10</c:f>
               <c:strCache>
-                <c:ptCount val="8"/>
+                <c:ptCount val="9"/>
                 <c:pt idx="0">
                   <c:v>도로접면</c:v>
                 </c:pt>
@@ -199,38 +199,44 @@
                 <c:pt idx="7">
                   <c:v>경사도</c:v>
                 </c:pt>
+                <c:pt idx="8">
+                  <c:v>유동인구</c:v>
+                </c:pt>
               </c:strCache>
             </c:strRef>
           </c:cat>
           <c:val>
             <c:numRef>
-              <c:f>Sheet1!$B$2:$B$9</c:f>
+              <c:f>Sheet1!$B$2:$B$10</c:f>
               <c:numCache>
                 <c:formatCode>General</c:formatCode>
-                <c:ptCount val="8"/>
+                <c:ptCount val="9"/>
                 <c:pt idx="0">
-                  <c:v>85.0</c:v>
+                  <c:v>85</c:v>
                 </c:pt>
                 <c:pt idx="1">
-                  <c:v>91.0</c:v>
+                  <c:v>91</c:v>
                 </c:pt>
                 <c:pt idx="2">
-                  <c:v>90.0</c:v>
+                  <c:v>90</c:v>
                 </c:pt>
                 <c:pt idx="3">
-                  <c:v>80.0</c:v>
+                  <c:v>80</c:v>
                 </c:pt>
                 <c:pt idx="4">
-                  <c:v>70.0</c:v>
+                  <c:v>70</c:v>
                 </c:pt>
                 <c:pt idx="5">
-                  <c:v>80.0</c:v>
+                  <c:v>80</c:v>
                 </c:pt>
                 <c:pt idx="6">
-                  <c:v>70.0</c:v>
+                  <c:v>70</c:v>
                 </c:pt>
                 <c:pt idx="7">
-                  <c:v>60.0</c:v>
+                  <c:v>60</c:v>
+                </c:pt>
+                <c:pt idx="8">
+                  <c:v>75</c:v>
                 </c:pt>
               </c:numCache>
             </c:numRef>
@@ -11787,6 +11793,201 @@
                   </a:tcPr>
                 </a:tc>
               </a:tr>
+              <a:tr h="429768">
+                <a:tc>
+                  <a:txBody>
+                    <a:bodyPr/>
+                    <a:lstStyle/>
+                    <a:p>
+                      <a:pPr indent="0" marL="0">
+                        <a:buNone/>
+                      </a:pPr>
+                      <a:r>
+                        <a:rPr>
+                          <a:solidFill/>
+                        </a:rPr>
+                        <a:t>⑨ 유동인구</a:t>
+                      </a:r>
+                      <a:endParaRPr lang="en-US" sz="950" dirty="0">
+                        <a:latin typeface="Malgun Gothic" charset="0"/>
+                        <a:ea typeface="Malgun Gothic" charset="0"/>
+                        <a:cs typeface="Malgun Gothic" charset="0"/>
+                      </a:endParaRPr>
+                    </a:p>
+                  </a:txBody>
+                  <a:tcPr marL="73152" marR="73152" marT="18288" marB="18288" anchor="ctr">
+                    <a:lnL w="6350" cap="flat" cmpd="sng" algn="ctr">
+                      <a:solidFill>
+                        <a:srgbClr val="D9DEE8"/>
+                      </a:solidFill>
+                      <a:prstDash val="solid"/>
+                      <a:round/>
+                      <a:headEnd type="none" w="med" len="med"/>
+                      <a:tailEnd type="none" w="med" len="med"/>
+                    </a:lnL>
+                    <a:lnR w="6350" cap="flat" cmpd="sng" algn="ctr">
+                      <a:solidFill>
+                        <a:srgbClr val="D9DEE8"/>
+                      </a:solidFill>
+                      <a:prstDash val="solid"/>
+                      <a:round/>
+                      <a:headEnd type="none" w="med" len="med"/>
+                      <a:tailEnd type="none" w="med" len="med"/>
+                    </a:lnR>
+                    <a:lnT w="6350" cap="flat" cmpd="sng" algn="ctr">
+                      <a:solidFill>
+                        <a:srgbClr val="D9DEE8"/>
+                      </a:solidFill>
+                      <a:prstDash val="solid"/>
+                      <a:round/>
+                      <a:headEnd type="none" w="med" len="med"/>
+                      <a:tailEnd type="none" w="med" len="med"/>
+                    </a:lnT>
+                    <a:lnB w="6350" cap="flat" cmpd="sng" algn="ctr">
+                      <a:solidFill>
+                        <a:srgbClr val="D9DEE8"/>
+                      </a:solidFill>
+                      <a:prstDash val="solid"/>
+                      <a:round/>
+                      <a:headEnd type="none" w="med" len="med"/>
+                      <a:tailEnd type="none" w="med" len="med"/>
+                    </a:lnB>
+                    <a:solidFill>
+                      <a:srgbClr val="F4F6FB"/>
+                    </a:solidFill>
+                  </a:tcPr>
+                </a:tc>
+                <a:tc>
+                  <a:txBody>
+                    <a:bodyPr/>
+                    <a:lstStyle/>
+                    <a:p>
+                      <a:pPr algn="ctr" indent="0" marL="0">
+                        <a:buNone/>
+                      </a:pPr>
+                      <a:r>
+                        <a:rPr lang="en-US" sz="950" b="1" dirty="0">
+                          <a:solidFill>
+                            <a:srgbClr val="6B7280"/>
+                          </a:solidFill>
+                          <a:latin typeface="Malgun Gothic" pitchFamily="34" charset="0"/>
+                          <a:ea typeface="Malgun Gothic" pitchFamily="34" charset="-122"/>
+                          <a:cs typeface="Malgun Gothic" pitchFamily="34" charset="-120"/>
+                        </a:rPr>
+                        <a:t/>
+                      </a:r>
+                      <a:endParaRPr lang="en-US" sz="950" dirty="0">
+                        <a:latin typeface="Malgun Gothic" charset="0"/>
+                        <a:ea typeface="Malgun Gothic" charset="0"/>
+                        <a:cs typeface="Malgun Gothic" charset="0"/>
+                      </a:endParaRPr>
+                    </a:p>
+                  </a:txBody>
+                  <a:tcPr marL="73152" marR="73152" marT="18288" marB="18288" anchor="ctr">
+                    <a:lnL w="6350" cap="flat" cmpd="sng" algn="ctr">
+                      <a:solidFill>
+                        <a:srgbClr val="D9DEE8"/>
+                      </a:solidFill>
+                      <a:prstDash val="solid"/>
+                      <a:round/>
+                      <a:headEnd type="none" w="med" len="med"/>
+                      <a:tailEnd type="none" w="med" len="med"/>
+                    </a:lnL>
+                    <a:lnR w="6350" cap="flat" cmpd="sng" algn="ctr">
+                      <a:solidFill>
+                        <a:srgbClr val="D9DEE8"/>
+                      </a:solidFill>
+                      <a:prstDash val="solid"/>
+                      <a:round/>
+                      <a:headEnd type="none" w="med" len="med"/>
+                      <a:tailEnd type="none" w="med" len="med"/>
+                    </a:lnR>
+                    <a:lnT w="6350" cap="flat" cmpd="sng" algn="ctr">
+                      <a:solidFill>
+                        <a:srgbClr val="D9DEE8"/>
+                      </a:solidFill>
+                      <a:prstDash val="solid"/>
+                      <a:round/>
+                      <a:headEnd type="none" w="med" len="med"/>
+                      <a:tailEnd type="none" w="med" len="med"/>
+                    </a:lnT>
+                    <a:lnB w="6350" cap="flat" cmpd="sng" algn="ctr">
+                      <a:solidFill>
+                        <a:srgbClr val="D9DEE8"/>
+                      </a:solidFill>
+                      <a:prstDash val="solid"/>
+                      <a:round/>
+                      <a:headEnd type="none" w="med" len="med"/>
+                      <a:tailEnd type="none" w="med" len="med"/>
+                    </a:lnB>
+                  </a:tcPr>
+                </a:tc>
+                <a:tc>
+                  <a:txBody>
+                    <a:bodyPr/>
+                    <a:lstStyle/>
+                    <a:p>
+                      <a:pPr indent="0" marL="0">
+                        <a:buNone/>
+                      </a:pPr>
+                      <a:r>
+                        <a:rPr lang="en-US" sz="950" dirty="0">
+                          <a:solidFill>
+                            <a:srgbClr val="333333"/>
+                          </a:solidFill>
+                          <a:latin typeface="Malgun Gothic" pitchFamily="34" charset="0"/>
+                          <a:ea typeface="Malgun Gothic" pitchFamily="34" charset="-122"/>
+                          <a:cs typeface="Malgun Gothic" pitchFamily="34" charset="-120"/>
+                        </a:rPr>
+                        <a:t/>
+                      </a:r>
+                      <a:endParaRPr lang="en-US" sz="950" dirty="0">
+                        <a:latin typeface="Malgun Gothic" charset="0"/>
+                        <a:ea typeface="Malgun Gothic" charset="0"/>
+                        <a:cs typeface="Malgun Gothic" charset="0"/>
+                      </a:endParaRPr>
+                    </a:p>
+                  </a:txBody>
+                  <a:tcPr marL="73152" marR="73152" marT="18288" marB="18288" anchor="ctr">
+                    <a:lnL w="6350" cap="flat" cmpd="sng" algn="ctr">
+                      <a:solidFill>
+                        <a:srgbClr val="D9DEE8"/>
+                      </a:solidFill>
+                      <a:prstDash val="solid"/>
+                      <a:round/>
+                      <a:headEnd type="none" w="med" len="med"/>
+                      <a:tailEnd type="none" w="med" len="med"/>
+                    </a:lnL>
+                    <a:lnR w="6350" cap="flat" cmpd="sng" algn="ctr">
+                      <a:solidFill>
+                        <a:srgbClr val="D9DEE8"/>
+                      </a:solidFill>
+                      <a:prstDash val="solid"/>
+                      <a:round/>
+                      <a:headEnd type="none" w="med" len="med"/>
+                      <a:tailEnd type="none" w="med" len="med"/>
+                    </a:lnR>
+                    <a:lnT w="6350" cap="flat" cmpd="sng" algn="ctr">
+                      <a:solidFill>
+                        <a:srgbClr val="D9DEE8"/>
+                      </a:solidFill>
+                      <a:prstDash val="solid"/>
+                      <a:round/>
+                      <a:headEnd type="none" w="med" len="med"/>
+                      <a:tailEnd type="none" w="med" len="med"/>
+                    </a:lnT>
+                    <a:lnB w="6350" cap="flat" cmpd="sng" algn="ctr">
+                      <a:solidFill>
+                        <a:srgbClr val="D9DEE8"/>
+                      </a:solidFill>
+                      <a:prstDash val="solid"/>
+                      <a:round/>
+                      <a:headEnd type="none" w="med" len="med"/>
+                      <a:tailEnd type="none" w="med" len="med"/>
+                    </a:lnB>
+                  </a:tcPr>
+                </a:tc>
+              </a:tr>
             </a:tbl>
           </a:graphicData>
         </a:graphic>
